--- a/doc/PostgreSQL六表关系示意图_ppt-master优化版.pptx
+++ b/doc/PostgreSQL六表关系示意图_ppt-master优化版.pptx
@@ -4,15 +4,18 @@
   <p:sldMasterIdLst>
     <p:sldMasterId id="2147483648" r:id="rId1"/>
   </p:sldMasterIdLst>
+  <p:notesMasterIdLst>
+    <p:notesMasterId r:id="rId8"/>
+  </p:notesMasterIdLst>
   <p:sldIdLst>
-    <p:sldId id="256" r:id="rId7"/>
-    <p:sldId id="257" r:id="rId8"/>
-    <p:sldId id="258" r:id="rId9"/>
-    <p:sldId id="259" r:id="rId10"/>
-    <p:sldId id="260" r:id="rId11"/>
-    <p:sldId id="261" r:id="rId12"/>
+    <p:sldId id="256" r:id="rId2"/>
+    <p:sldId id="257" r:id="rId3"/>
+    <p:sldId id="258" r:id="rId4"/>
+    <p:sldId id="259" r:id="rId5"/>
+    <p:sldId id="260" r:id="rId6"/>
+    <p:sldId id="261" r:id="rId7"/>
   </p:sldIdLst>
-  <p:sldSz cx="12192000" cy="6858000" type="screen4x3"/>
+  <p:sldSz cx="12192000" cy="6858000"/>
   <p:notesSz cx="6858000" cy="9144000"/>
   <p:defaultTextStyle>
     <a:defPPr>
@@ -109,7 +112,148 @@
       </a:defRPr>
     </a:lvl9pPr>
   </p:defaultTextStyle>
+  <p:extLst>
+    <p:ext uri="{EFAFB233-063F-42B5-8137-9DF3F51BA10A}">
+      <p15:sldGuideLst xmlns:p15="http://schemas.microsoft.com/office/powerpoint/2012/main">
+        <p15:guide id="1" orient="horz" pos="2160">
+          <p15:clr>
+            <a:srgbClr val="A4A3A4"/>
+          </p15:clr>
+        </p15:guide>
+        <p15:guide id="2" pos="2880">
+          <p15:clr>
+            <a:srgbClr val="A4A3A4"/>
+          </p15:clr>
+        </p15:guide>
+      </p15:sldGuideLst>
+    </p:ext>
+  </p:extLst>
 </p:presentation>
+</file>
+
+<file path=ppt/notesMasters/notesMaster1.xml><?xml version="1.0" encoding="utf-8"?>
+<p:notesMaster xmlns:a="http://schemas.openxmlformats.org/drawingml/2006/main" xmlns:r="http://schemas.openxmlformats.org/officeDocument/2006/relationships" xmlns:p="http://schemas.openxmlformats.org/presentationml/2006/main">
+  <p:cSld>
+    <p:bg>
+      <p:bgRef idx="1001">
+        <a:schemeClr val="bg1"/>
+      </p:bgRef>
+    </p:bg>
+    <p:spTree>
+      <p:nvGrpSpPr>
+        <p:cNvPr id="1" name=""/>
+        <p:cNvGrpSpPr/>
+        <p:nvPr/>
+      </p:nvGrpSpPr>
+      <p:grpSpPr>
+        <a:xfrm>
+          <a:off x="0" y="0"/>
+          <a:ext cx="0" cy="0"/>
+          <a:chOff x="0" y="0"/>
+          <a:chExt cx="0" cy="0"/>
+        </a:xfrm>
+      </p:grpSpPr>
+    </p:spTree>
+    <p:extLst>
+      <p:ext uri="{BB962C8B-B14F-4D97-AF65-F5344CB8AC3E}">
+        <p14:creationId xmlns:p14="http://schemas.microsoft.com/office/powerpoint/2010/main" val="1404290703"/>
+      </p:ext>
+    </p:extLst>
+  </p:cSld>
+  <p:clrMap bg1="lt1" tx1="dk1" bg2="lt2" tx2="dk2" accent1="accent1" accent2="accent2" accent3="accent3" accent4="accent4" accent5="accent5" accent6="accent6" hlink="hlink" folHlink="folHlink"/>
+  <p:notesStyle>
+    <a:lvl1pPr marL="0" algn="l" defTabSz="914400" rtl="0" eaLnBrk="1" latinLnBrk="0" hangingPunct="1">
+      <a:defRPr sz="1200" kern="1200">
+        <a:solidFill>
+          <a:schemeClr val="tx1"/>
+        </a:solidFill>
+        <a:latin typeface="+mn-lt"/>
+        <a:ea typeface="+mn-ea"/>
+        <a:cs typeface="+mn-cs"/>
+      </a:defRPr>
+    </a:lvl1pPr>
+    <a:lvl2pPr marL="457200" algn="l" defTabSz="914400" rtl="0" eaLnBrk="1" latinLnBrk="0" hangingPunct="1">
+      <a:defRPr sz="1200" kern="1200">
+        <a:solidFill>
+          <a:schemeClr val="tx1"/>
+        </a:solidFill>
+        <a:latin typeface="+mn-lt"/>
+        <a:ea typeface="+mn-ea"/>
+        <a:cs typeface="+mn-cs"/>
+      </a:defRPr>
+    </a:lvl2pPr>
+    <a:lvl3pPr marL="914400" algn="l" defTabSz="914400" rtl="0" eaLnBrk="1" latinLnBrk="0" hangingPunct="1">
+      <a:defRPr sz="1200" kern="1200">
+        <a:solidFill>
+          <a:schemeClr val="tx1"/>
+        </a:solidFill>
+        <a:latin typeface="+mn-lt"/>
+        <a:ea typeface="+mn-ea"/>
+        <a:cs typeface="+mn-cs"/>
+      </a:defRPr>
+    </a:lvl3pPr>
+    <a:lvl4pPr marL="1371600" algn="l" defTabSz="914400" rtl="0" eaLnBrk="1" latinLnBrk="0" hangingPunct="1">
+      <a:defRPr sz="1200" kern="1200">
+        <a:solidFill>
+          <a:schemeClr val="tx1"/>
+        </a:solidFill>
+        <a:latin typeface="+mn-lt"/>
+        <a:ea typeface="+mn-ea"/>
+        <a:cs typeface="+mn-cs"/>
+      </a:defRPr>
+    </a:lvl4pPr>
+    <a:lvl5pPr marL="1828800" algn="l" defTabSz="914400" rtl="0" eaLnBrk="1" latinLnBrk="0" hangingPunct="1">
+      <a:defRPr sz="1200" kern="1200">
+        <a:solidFill>
+          <a:schemeClr val="tx1"/>
+        </a:solidFill>
+        <a:latin typeface="+mn-lt"/>
+        <a:ea typeface="+mn-ea"/>
+        <a:cs typeface="+mn-cs"/>
+      </a:defRPr>
+    </a:lvl5pPr>
+    <a:lvl6pPr marL="2286000" algn="l" defTabSz="914400" rtl="0" eaLnBrk="1" latinLnBrk="0" hangingPunct="1">
+      <a:defRPr sz="1200" kern="1200">
+        <a:solidFill>
+          <a:schemeClr val="tx1"/>
+        </a:solidFill>
+        <a:latin typeface="+mn-lt"/>
+        <a:ea typeface="+mn-ea"/>
+        <a:cs typeface="+mn-cs"/>
+      </a:defRPr>
+    </a:lvl6pPr>
+    <a:lvl7pPr marL="2743200" algn="l" defTabSz="914400" rtl="0" eaLnBrk="1" latinLnBrk="0" hangingPunct="1">
+      <a:defRPr sz="1200" kern="1200">
+        <a:solidFill>
+          <a:schemeClr val="tx1"/>
+        </a:solidFill>
+        <a:latin typeface="+mn-lt"/>
+        <a:ea typeface="+mn-ea"/>
+        <a:cs typeface="+mn-cs"/>
+      </a:defRPr>
+    </a:lvl7pPr>
+    <a:lvl8pPr marL="3200400" algn="l" defTabSz="914400" rtl="0" eaLnBrk="1" latinLnBrk="0" hangingPunct="1">
+      <a:defRPr sz="1200" kern="1200">
+        <a:solidFill>
+          <a:schemeClr val="tx1"/>
+        </a:solidFill>
+        <a:latin typeface="+mn-lt"/>
+        <a:ea typeface="+mn-ea"/>
+        <a:cs typeface="+mn-cs"/>
+      </a:defRPr>
+    </a:lvl8pPr>
+    <a:lvl9pPr marL="3657600" algn="l" defTabSz="914400" rtl="0" eaLnBrk="1" latinLnBrk="0" hangingPunct="1">
+      <a:defRPr sz="1200" kern="1200">
+        <a:solidFill>
+          <a:schemeClr val="tx1"/>
+        </a:solidFill>
+        <a:latin typeface="+mn-lt"/>
+        <a:ea typeface="+mn-ea"/>
+        <a:cs typeface="+mn-cs"/>
+      </a:defRPr>
+    </a:lvl9pPr>
+  </p:notesStyle>
+</p:notesMaster>
 </file>
 
 <file path=ppt/notesSlides/notesSlide1.xml><?xml version="1.0" encoding="utf-8"?>
@@ -504,10 +648,9 @@
           <a:lstStyle/>
           <a:p>
             <a:r>
-              <a:rPr lang="en-US" smtClean="0"/>
+              <a:rPr lang="en-US"/>
               <a:t>Click to edit Master title style</a:t>
             </a:r>
-            <a:endParaRPr lang="en-US"/>
           </a:p>
         </p:txBody>
       </p:sp>
@@ -623,10 +766,9 @@
           </a:lstStyle>
           <a:p>
             <a:r>
-              <a:rPr lang="en-US" smtClean="0"/>
+              <a:rPr lang="en-US"/>
               <a:t>Click to edit Master subtitle style</a:t>
             </a:r>
-            <a:endParaRPr lang="en-US"/>
           </a:p>
         </p:txBody>
       </p:sp>
@@ -647,7 +789,7 @@
           <a:p>
             <a:fld id="{5BCAD085-E8A6-8845-BD4E-CB4CCA059FC4}" type="datetimeFigureOut">
               <a:rPr lang="en-US" smtClean="0"/>
-              <a:t>1/27/13</a:t>
+              <a:t>6/13/26</a:t>
             </a:fld>
             <a:endParaRPr lang="en-US"/>
           </a:p>
@@ -741,10 +883,9 @@
           <a:lstStyle/>
           <a:p>
             <a:r>
-              <a:rPr lang="en-US" smtClean="0"/>
+              <a:rPr lang="en-US"/>
               <a:t>Click to edit Master title style</a:t>
             </a:r>
-            <a:endParaRPr lang="en-US"/>
           </a:p>
         </p:txBody>
       </p:sp>
@@ -765,38 +906,37 @@
           <a:p>
             <a:pPr lvl="0"/>
             <a:r>
-              <a:rPr lang="en-US" smtClean="0"/>
+              <a:rPr lang="en-US"/>
               <a:t>Click to edit Master text styles</a:t>
             </a:r>
           </a:p>
           <a:p>
             <a:pPr lvl="1"/>
             <a:r>
-              <a:rPr lang="en-US" smtClean="0"/>
+              <a:rPr lang="en-US"/>
               <a:t>Second level</a:t>
             </a:r>
           </a:p>
           <a:p>
             <a:pPr lvl="2"/>
             <a:r>
-              <a:rPr lang="en-US" smtClean="0"/>
+              <a:rPr lang="en-US"/>
               <a:t>Third level</a:t>
             </a:r>
           </a:p>
           <a:p>
             <a:pPr lvl="3"/>
             <a:r>
-              <a:rPr lang="en-US" smtClean="0"/>
+              <a:rPr lang="en-US"/>
               <a:t>Fourth level</a:t>
             </a:r>
           </a:p>
           <a:p>
             <a:pPr lvl="4"/>
             <a:r>
-              <a:rPr lang="en-US" smtClean="0"/>
+              <a:rPr lang="en-US"/>
               <a:t>Fifth level</a:t>
             </a:r>
-            <a:endParaRPr lang="en-US"/>
           </a:p>
         </p:txBody>
       </p:sp>
@@ -817,7 +957,7 @@
           <a:p>
             <a:fld id="{5BCAD085-E8A6-8845-BD4E-CB4CCA059FC4}" type="datetimeFigureOut">
               <a:rPr lang="en-US" smtClean="0"/>
-              <a:t>1/27/13</a:t>
+              <a:t>6/13/26</a:t>
             </a:fld>
             <a:endParaRPr lang="en-US"/>
           </a:p>
@@ -916,10 +1056,9 @@
           <a:lstStyle/>
           <a:p>
             <a:r>
-              <a:rPr lang="en-US" smtClean="0"/>
+              <a:rPr lang="en-US"/>
               <a:t>Click to edit Master title style</a:t>
             </a:r>
-            <a:endParaRPr lang="en-US"/>
           </a:p>
         </p:txBody>
       </p:sp>
@@ -945,38 +1084,37 @@
           <a:p>
             <a:pPr lvl="0"/>
             <a:r>
-              <a:rPr lang="en-US" smtClean="0"/>
+              <a:rPr lang="en-US"/>
               <a:t>Click to edit Master text styles</a:t>
             </a:r>
           </a:p>
           <a:p>
             <a:pPr lvl="1"/>
             <a:r>
-              <a:rPr lang="en-US" smtClean="0"/>
+              <a:rPr lang="en-US"/>
               <a:t>Second level</a:t>
             </a:r>
           </a:p>
           <a:p>
             <a:pPr lvl="2"/>
             <a:r>
-              <a:rPr lang="en-US" smtClean="0"/>
+              <a:rPr lang="en-US"/>
               <a:t>Third level</a:t>
             </a:r>
           </a:p>
           <a:p>
             <a:pPr lvl="3"/>
             <a:r>
-              <a:rPr lang="en-US" smtClean="0"/>
+              <a:rPr lang="en-US"/>
               <a:t>Fourth level</a:t>
             </a:r>
           </a:p>
           <a:p>
             <a:pPr lvl="4"/>
             <a:r>
-              <a:rPr lang="en-US" smtClean="0"/>
+              <a:rPr lang="en-US"/>
               <a:t>Fifth level</a:t>
             </a:r>
-            <a:endParaRPr lang="en-US"/>
           </a:p>
         </p:txBody>
       </p:sp>
@@ -997,7 +1135,7 @@
           <a:p>
             <a:fld id="{5BCAD085-E8A6-8845-BD4E-CB4CCA059FC4}" type="datetimeFigureOut">
               <a:rPr lang="en-US" smtClean="0"/>
-              <a:t>1/27/13</a:t>
+              <a:t>6/13/26</a:t>
             </a:fld>
             <a:endParaRPr lang="en-US"/>
           </a:p>
@@ -1091,10 +1229,9 @@
           <a:lstStyle/>
           <a:p>
             <a:r>
-              <a:rPr lang="en-US" smtClean="0"/>
+              <a:rPr lang="en-US"/>
               <a:t>Click to edit Master title style</a:t>
             </a:r>
-            <a:endParaRPr lang="en-US"/>
           </a:p>
         </p:txBody>
       </p:sp>
@@ -1115,38 +1252,37 @@
           <a:p>
             <a:pPr lvl="0"/>
             <a:r>
-              <a:rPr lang="en-US" smtClean="0"/>
+              <a:rPr lang="en-US"/>
               <a:t>Click to edit Master text styles</a:t>
             </a:r>
           </a:p>
           <a:p>
             <a:pPr lvl="1"/>
             <a:r>
-              <a:rPr lang="en-US" smtClean="0"/>
+              <a:rPr lang="en-US"/>
               <a:t>Second level</a:t>
             </a:r>
           </a:p>
           <a:p>
             <a:pPr lvl="2"/>
             <a:r>
-              <a:rPr lang="en-US" smtClean="0"/>
+              <a:rPr lang="en-US"/>
               <a:t>Third level</a:t>
             </a:r>
           </a:p>
           <a:p>
             <a:pPr lvl="3"/>
             <a:r>
-              <a:rPr lang="en-US" smtClean="0"/>
+              <a:rPr lang="en-US"/>
               <a:t>Fourth level</a:t>
             </a:r>
           </a:p>
           <a:p>
             <a:pPr lvl="4"/>
             <a:r>
-              <a:rPr lang="en-US" smtClean="0"/>
+              <a:rPr lang="en-US"/>
               <a:t>Fifth level</a:t>
             </a:r>
-            <a:endParaRPr lang="en-US"/>
           </a:p>
         </p:txBody>
       </p:sp>
@@ -1167,7 +1303,7 @@
           <a:p>
             <a:fld id="{5BCAD085-E8A6-8845-BD4E-CB4CCA059FC4}" type="datetimeFigureOut">
               <a:rPr lang="en-US" smtClean="0"/>
-              <a:t>1/27/13</a:t>
+              <a:t>6/13/26</a:t>
             </a:fld>
             <a:endParaRPr lang="en-US"/>
           </a:p>
@@ -1270,10 +1406,9 @@
           </a:lstStyle>
           <a:p>
             <a:r>
-              <a:rPr lang="en-US" smtClean="0"/>
+              <a:rPr lang="en-US"/>
               <a:t>Click to edit Master title style</a:t>
             </a:r>
-            <a:endParaRPr lang="en-US"/>
           </a:p>
         </p:txBody>
       </p:sp>
@@ -1390,7 +1525,7 @@
           <a:p>
             <a:pPr lvl="0"/>
             <a:r>
-              <a:rPr lang="en-US" smtClean="0"/>
+              <a:rPr lang="en-US"/>
               <a:t>Click to edit Master text styles</a:t>
             </a:r>
           </a:p>
@@ -1413,7 +1548,7 @@
           <a:p>
             <a:fld id="{5BCAD085-E8A6-8845-BD4E-CB4CCA059FC4}" type="datetimeFigureOut">
               <a:rPr lang="en-US" smtClean="0"/>
-              <a:t>1/27/13</a:t>
+              <a:t>6/13/26</a:t>
             </a:fld>
             <a:endParaRPr lang="en-US"/>
           </a:p>
@@ -1507,10 +1642,9 @@
           <a:lstStyle/>
           <a:p>
             <a:r>
-              <a:rPr lang="en-US" smtClean="0"/>
+              <a:rPr lang="en-US"/>
               <a:t>Click to edit Master title style</a:t>
             </a:r>
-            <a:endParaRPr lang="en-US"/>
           </a:p>
         </p:txBody>
       </p:sp>
@@ -1564,38 +1698,37 @@
           <a:p>
             <a:pPr lvl="0"/>
             <a:r>
-              <a:rPr lang="en-US" smtClean="0"/>
+              <a:rPr lang="en-US"/>
               <a:t>Click to edit Master text styles</a:t>
             </a:r>
           </a:p>
           <a:p>
             <a:pPr lvl="1"/>
             <a:r>
-              <a:rPr lang="en-US" smtClean="0"/>
+              <a:rPr lang="en-US"/>
               <a:t>Second level</a:t>
             </a:r>
           </a:p>
           <a:p>
             <a:pPr lvl="2"/>
             <a:r>
-              <a:rPr lang="en-US" smtClean="0"/>
+              <a:rPr lang="en-US"/>
               <a:t>Third level</a:t>
             </a:r>
           </a:p>
           <a:p>
             <a:pPr lvl="3"/>
             <a:r>
-              <a:rPr lang="en-US" smtClean="0"/>
+              <a:rPr lang="en-US"/>
               <a:t>Fourth level</a:t>
             </a:r>
           </a:p>
           <a:p>
             <a:pPr lvl="4"/>
             <a:r>
-              <a:rPr lang="en-US" smtClean="0"/>
+              <a:rPr lang="en-US"/>
               <a:t>Fifth level</a:t>
             </a:r>
-            <a:endParaRPr lang="en-US"/>
           </a:p>
         </p:txBody>
       </p:sp>
@@ -1649,38 +1782,37 @@
           <a:p>
             <a:pPr lvl="0"/>
             <a:r>
-              <a:rPr lang="en-US" smtClean="0"/>
+              <a:rPr lang="en-US"/>
               <a:t>Click to edit Master text styles</a:t>
             </a:r>
           </a:p>
           <a:p>
             <a:pPr lvl="1"/>
             <a:r>
-              <a:rPr lang="en-US" smtClean="0"/>
+              <a:rPr lang="en-US"/>
               <a:t>Second level</a:t>
             </a:r>
           </a:p>
           <a:p>
             <a:pPr lvl="2"/>
             <a:r>
-              <a:rPr lang="en-US" smtClean="0"/>
+              <a:rPr lang="en-US"/>
               <a:t>Third level</a:t>
             </a:r>
           </a:p>
           <a:p>
             <a:pPr lvl="3"/>
             <a:r>
-              <a:rPr lang="en-US" smtClean="0"/>
+              <a:rPr lang="en-US"/>
               <a:t>Fourth level</a:t>
             </a:r>
           </a:p>
           <a:p>
             <a:pPr lvl="4"/>
             <a:r>
-              <a:rPr lang="en-US" smtClean="0"/>
+              <a:rPr lang="en-US"/>
               <a:t>Fifth level</a:t>
             </a:r>
-            <a:endParaRPr lang="en-US"/>
           </a:p>
         </p:txBody>
       </p:sp>
@@ -1701,7 +1833,7 @@
           <a:p>
             <a:fld id="{5BCAD085-E8A6-8845-BD4E-CB4CCA059FC4}" type="datetimeFigureOut">
               <a:rPr lang="en-US" smtClean="0"/>
-              <a:t>1/27/13</a:t>
+              <a:t>6/13/26</a:t>
             </a:fld>
             <a:endParaRPr lang="en-US"/>
           </a:p>
@@ -1799,10 +1931,9 @@
           </a:lstStyle>
           <a:p>
             <a:r>
-              <a:rPr lang="en-US" smtClean="0"/>
+              <a:rPr lang="en-US"/>
               <a:t>Click to edit Master title style</a:t>
             </a:r>
-            <a:endParaRPr lang="en-US"/>
           </a:p>
         </p:txBody>
       </p:sp>
@@ -1865,7 +1996,7 @@
           <a:p>
             <a:pPr lvl="0"/>
             <a:r>
-              <a:rPr lang="en-US" smtClean="0"/>
+              <a:rPr lang="en-US"/>
               <a:t>Click to edit Master text styles</a:t>
             </a:r>
           </a:p>
@@ -1921,38 +2052,37 @@
           <a:p>
             <a:pPr lvl="0"/>
             <a:r>
-              <a:rPr lang="en-US" smtClean="0"/>
+              <a:rPr lang="en-US"/>
               <a:t>Click to edit Master text styles</a:t>
             </a:r>
           </a:p>
           <a:p>
             <a:pPr lvl="1"/>
             <a:r>
-              <a:rPr lang="en-US" smtClean="0"/>
+              <a:rPr lang="en-US"/>
               <a:t>Second level</a:t>
             </a:r>
           </a:p>
           <a:p>
             <a:pPr lvl="2"/>
             <a:r>
-              <a:rPr lang="en-US" smtClean="0"/>
+              <a:rPr lang="en-US"/>
               <a:t>Third level</a:t>
             </a:r>
           </a:p>
           <a:p>
             <a:pPr lvl="3"/>
             <a:r>
-              <a:rPr lang="en-US" smtClean="0"/>
+              <a:rPr lang="en-US"/>
               <a:t>Fourth level</a:t>
             </a:r>
           </a:p>
           <a:p>
             <a:pPr lvl="4"/>
             <a:r>
-              <a:rPr lang="en-US" smtClean="0"/>
+              <a:rPr lang="en-US"/>
               <a:t>Fifth level</a:t>
             </a:r>
-            <a:endParaRPr lang="en-US"/>
           </a:p>
         </p:txBody>
       </p:sp>
@@ -2015,7 +2145,7 @@
           <a:p>
             <a:pPr lvl="0"/>
             <a:r>
-              <a:rPr lang="en-US" smtClean="0"/>
+              <a:rPr lang="en-US"/>
               <a:t>Click to edit Master text styles</a:t>
             </a:r>
           </a:p>
@@ -2071,38 +2201,37 @@
           <a:p>
             <a:pPr lvl="0"/>
             <a:r>
-              <a:rPr lang="en-US" smtClean="0"/>
+              <a:rPr lang="en-US"/>
               <a:t>Click to edit Master text styles</a:t>
             </a:r>
           </a:p>
           <a:p>
             <a:pPr lvl="1"/>
             <a:r>
-              <a:rPr lang="en-US" smtClean="0"/>
+              <a:rPr lang="en-US"/>
               <a:t>Second level</a:t>
             </a:r>
           </a:p>
           <a:p>
             <a:pPr lvl="2"/>
             <a:r>
-              <a:rPr lang="en-US" smtClean="0"/>
+              <a:rPr lang="en-US"/>
               <a:t>Third level</a:t>
             </a:r>
           </a:p>
           <a:p>
             <a:pPr lvl="3"/>
             <a:r>
-              <a:rPr lang="en-US" smtClean="0"/>
+              <a:rPr lang="en-US"/>
               <a:t>Fourth level</a:t>
             </a:r>
           </a:p>
           <a:p>
             <a:pPr lvl="4"/>
             <a:r>
-              <a:rPr lang="en-US" smtClean="0"/>
+              <a:rPr lang="en-US"/>
               <a:t>Fifth level</a:t>
             </a:r>
-            <a:endParaRPr lang="en-US"/>
           </a:p>
         </p:txBody>
       </p:sp>
@@ -2123,7 +2252,7 @@
           <a:p>
             <a:fld id="{5BCAD085-E8A6-8845-BD4E-CB4CCA059FC4}" type="datetimeFigureOut">
               <a:rPr lang="en-US" smtClean="0"/>
-              <a:t>1/27/13</a:t>
+              <a:t>6/13/26</a:t>
             </a:fld>
             <a:endParaRPr lang="en-US"/>
           </a:p>
@@ -2217,10 +2346,9 @@
           <a:lstStyle/>
           <a:p>
             <a:r>
-              <a:rPr lang="en-US" smtClean="0"/>
+              <a:rPr lang="en-US"/>
               <a:t>Click to edit Master title style</a:t>
             </a:r>
-            <a:endParaRPr lang="en-US"/>
           </a:p>
         </p:txBody>
       </p:sp>
@@ -2241,7 +2369,7 @@
           <a:p>
             <a:fld id="{5BCAD085-E8A6-8845-BD4E-CB4CCA059FC4}" type="datetimeFigureOut">
               <a:rPr lang="en-US" smtClean="0"/>
-              <a:t>1/27/13</a:t>
+              <a:t>6/13/26</a:t>
             </a:fld>
             <a:endParaRPr lang="en-US"/>
           </a:p>
@@ -2336,7 +2464,7 @@
           <a:p>
             <a:fld id="{5BCAD085-E8A6-8845-BD4E-CB4CCA059FC4}" type="datetimeFigureOut">
               <a:rPr lang="en-US" smtClean="0"/>
-              <a:t>1/27/13</a:t>
+              <a:t>6/13/26</a:t>
             </a:fld>
             <a:endParaRPr lang="en-US"/>
           </a:p>
@@ -2439,10 +2567,9 @@
           </a:lstStyle>
           <a:p>
             <a:r>
-              <a:rPr lang="en-US" smtClean="0"/>
+              <a:rPr lang="en-US"/>
               <a:t>Click to edit Master title style</a:t>
             </a:r>
-            <a:endParaRPr lang="en-US"/>
           </a:p>
         </p:txBody>
       </p:sp>
@@ -2496,38 +2623,37 @@
           <a:p>
             <a:pPr lvl="0"/>
             <a:r>
-              <a:rPr lang="en-US" smtClean="0"/>
+              <a:rPr lang="en-US"/>
               <a:t>Click to edit Master text styles</a:t>
             </a:r>
           </a:p>
           <a:p>
             <a:pPr lvl="1"/>
             <a:r>
-              <a:rPr lang="en-US" smtClean="0"/>
+              <a:rPr lang="en-US"/>
               <a:t>Second level</a:t>
             </a:r>
           </a:p>
           <a:p>
             <a:pPr lvl="2"/>
             <a:r>
-              <a:rPr lang="en-US" smtClean="0"/>
+              <a:rPr lang="en-US"/>
               <a:t>Third level</a:t>
             </a:r>
           </a:p>
           <a:p>
             <a:pPr lvl="3"/>
             <a:r>
-              <a:rPr lang="en-US" smtClean="0"/>
+              <a:rPr lang="en-US"/>
               <a:t>Fourth level</a:t>
             </a:r>
           </a:p>
           <a:p>
             <a:pPr lvl="4"/>
             <a:r>
-              <a:rPr lang="en-US" smtClean="0"/>
+              <a:rPr lang="en-US"/>
               <a:t>Fifth level</a:t>
             </a:r>
-            <a:endParaRPr lang="en-US"/>
           </a:p>
         </p:txBody>
       </p:sp>
@@ -2590,7 +2716,7 @@
           <a:p>
             <a:pPr lvl="0"/>
             <a:r>
-              <a:rPr lang="en-US" smtClean="0"/>
+              <a:rPr lang="en-US"/>
               <a:t>Click to edit Master text styles</a:t>
             </a:r>
           </a:p>
@@ -2613,7 +2739,7 @@
           <a:p>
             <a:fld id="{5BCAD085-E8A6-8845-BD4E-CB4CCA059FC4}" type="datetimeFigureOut">
               <a:rPr lang="en-US" smtClean="0"/>
-              <a:t>1/27/13</a:t>
+              <a:t>6/13/26</a:t>
             </a:fld>
             <a:endParaRPr lang="en-US"/>
           </a:p>
@@ -2716,10 +2842,9 @@
           </a:lstStyle>
           <a:p>
             <a:r>
-              <a:rPr lang="en-US" smtClean="0"/>
+              <a:rPr lang="en-US"/>
               <a:t>Click to edit Master title style</a:t>
             </a:r>
-            <a:endParaRPr lang="en-US"/>
           </a:p>
         </p:txBody>
       </p:sp>
@@ -2843,7 +2968,7 @@
           <a:p>
             <a:pPr lvl="0"/>
             <a:r>
-              <a:rPr lang="en-US" smtClean="0"/>
+              <a:rPr lang="en-US"/>
               <a:t>Click to edit Master text styles</a:t>
             </a:r>
           </a:p>
@@ -2866,7 +2991,7 @@
           <a:p>
             <a:fld id="{5BCAD085-E8A6-8845-BD4E-CB4CCA059FC4}" type="datetimeFigureOut">
               <a:rPr lang="en-US" smtClean="0"/>
-              <a:t>1/27/13</a:t>
+              <a:t>6/13/26</a:t>
             </a:fld>
             <a:endParaRPr lang="en-US"/>
           </a:p>
@@ -2975,10 +3100,9 @@
           <a:lstStyle/>
           <a:p>
             <a:r>
-              <a:rPr lang="en-US" smtClean="0"/>
+              <a:rPr lang="en-US"/>
               <a:t>Click to edit Master title style</a:t>
             </a:r>
-            <a:endParaRPr lang="en-US"/>
           </a:p>
         </p:txBody>
       </p:sp>
@@ -3009,38 +3133,37 @@
           <a:p>
             <a:pPr lvl="0"/>
             <a:r>
-              <a:rPr lang="en-US" smtClean="0"/>
+              <a:rPr lang="en-US"/>
               <a:t>Click to edit Master text styles</a:t>
             </a:r>
           </a:p>
           <a:p>
             <a:pPr lvl="1"/>
             <a:r>
-              <a:rPr lang="en-US" smtClean="0"/>
+              <a:rPr lang="en-US"/>
               <a:t>Second level</a:t>
             </a:r>
           </a:p>
           <a:p>
             <a:pPr lvl="2"/>
             <a:r>
-              <a:rPr lang="en-US" smtClean="0"/>
+              <a:rPr lang="en-US"/>
               <a:t>Third level</a:t>
             </a:r>
           </a:p>
           <a:p>
             <a:pPr lvl="3"/>
             <a:r>
-              <a:rPr lang="en-US" smtClean="0"/>
+              <a:rPr lang="en-US"/>
               <a:t>Fourth level</a:t>
             </a:r>
           </a:p>
           <a:p>
             <a:pPr lvl="4"/>
             <a:r>
-              <a:rPr lang="en-US" smtClean="0"/>
+              <a:rPr lang="en-US"/>
               <a:t>Fifth level</a:t>
             </a:r>
-            <a:endParaRPr lang="en-US"/>
           </a:p>
         </p:txBody>
       </p:sp>
@@ -3079,7 +3202,7 @@
           <a:p>
             <a:fld id="{5BCAD085-E8A6-8845-BD4E-CB4CCA059FC4}" type="datetimeFigureOut">
               <a:rPr lang="en-US" smtClean="0"/>
-              <a:t>1/27/13</a:t>
+              <a:t>6/13/26</a:t>
             </a:fld>
             <a:endParaRPr lang="en-US"/>
           </a:p>
@@ -3489,6 +3612,13 @@
               <a:noFill/>
             </a:ln>
           </p:spPr>
+          <p:txBody>
+            <a:bodyPr/>
+            <a:lstStyle/>
+            <a:p>
+              <a:endParaRPr lang="zh-CN" altLang="en-US"/>
+            </a:p>
+          </p:txBody>
         </p:sp>
         <p:sp>
           <p:nvSpPr>
@@ -3511,6 +3641,13 @@
               <a:noFill/>
             </a:ln>
           </p:spPr>
+          <p:txBody>
+            <a:bodyPr/>
+            <a:lstStyle/>
+            <a:p>
+              <a:endParaRPr lang="zh-CN" altLang="en-US"/>
+            </a:p>
+          </p:txBody>
         </p:sp>
         <p:sp>
           <p:nvSpPr>
@@ -3535,6 +3672,13 @@
               <a:noFill/>
             </a:ln>
           </p:spPr>
+          <p:txBody>
+            <a:bodyPr/>
+            <a:lstStyle/>
+            <a:p>
+              <a:endParaRPr lang="zh-CN" altLang="en-US"/>
+            </a:p>
+          </p:txBody>
         </p:sp>
         <p:sp>
           <p:nvSpPr>
@@ -3559,6 +3703,13 @@
               <a:noFill/>
             </a:ln>
           </p:spPr>
+          <p:txBody>
+            <a:bodyPr/>
+            <a:lstStyle/>
+            <a:p>
+              <a:endParaRPr lang="zh-CN" altLang="en-US"/>
+            </a:p>
+          </p:txBody>
         </p:sp>
       </p:grpSp>
       <p:grpSp>
@@ -3770,6 +3921,13 @@
               </a:solidFill>
             </a:ln>
           </p:spPr>
+          <p:txBody>
+            <a:bodyPr/>
+            <a:lstStyle/>
+            <a:p>
+              <a:endParaRPr lang="zh-CN" altLang="en-US"/>
+            </a:p>
+          </p:txBody>
         </p:sp>
       </p:grpSp>
       <p:grpSp>
@@ -3824,6 +3982,13 @@
               <a:tailEnd type="triangle" w="lg" len="lg"/>
             </a:ln>
           </p:spPr>
+          <p:txBody>
+            <a:bodyPr/>
+            <a:lstStyle/>
+            <a:p>
+              <a:endParaRPr lang="zh-CN" altLang="en-US"/>
+            </a:p>
+          </p:txBody>
         </p:sp>
         <p:sp>
           <p:nvSpPr>
@@ -3863,6 +4028,13 @@
               <a:tailEnd type="triangle" w="lg" len="lg"/>
             </a:ln>
           </p:spPr>
+          <p:txBody>
+            <a:bodyPr/>
+            <a:lstStyle/>
+            <a:p>
+              <a:endParaRPr lang="zh-CN" altLang="en-US"/>
+            </a:p>
+          </p:txBody>
         </p:sp>
         <p:sp>
           <p:nvSpPr>
@@ -3902,6 +4074,13 @@
               <a:tailEnd type="triangle" w="lg" len="lg"/>
             </a:ln>
           </p:spPr>
+          <p:txBody>
+            <a:bodyPr/>
+            <a:lstStyle/>
+            <a:p>
+              <a:endParaRPr lang="zh-CN" altLang="en-US"/>
+            </a:p>
+          </p:txBody>
         </p:sp>
         <p:sp>
           <p:nvSpPr>
@@ -3928,6 +4107,13 @@
               <a:noFill/>
             </a:ln>
           </p:spPr>
+          <p:txBody>
+            <a:bodyPr/>
+            <a:lstStyle/>
+            <a:p>
+              <a:endParaRPr lang="zh-CN" altLang="en-US"/>
+            </a:p>
+          </p:txBody>
         </p:sp>
         <p:sp>
           <p:nvSpPr>
@@ -3994,6 +4180,13 @@
               <a:noFill/>
             </a:ln>
           </p:spPr>
+          <p:txBody>
+            <a:bodyPr/>
+            <a:lstStyle/>
+            <a:p>
+              <a:endParaRPr lang="zh-CN" altLang="en-US"/>
+            </a:p>
+          </p:txBody>
         </p:sp>
         <p:sp>
           <p:nvSpPr>
@@ -4060,6 +4253,13 @@
               <a:noFill/>
             </a:ln>
           </p:spPr>
+          <p:txBody>
+            <a:bodyPr/>
+            <a:lstStyle/>
+            <a:p>
+              <a:endParaRPr lang="zh-CN" altLang="en-US"/>
+            </a:p>
+          </p:txBody>
         </p:sp>
         <p:sp>
           <p:nvSpPr>
@@ -4141,6 +4341,13 @@
               </a:solidFill>
             </a:ln>
           </p:spPr>
+          <p:txBody>
+            <a:bodyPr/>
+            <a:lstStyle/>
+            <a:p>
+              <a:endParaRPr lang="zh-CN" altLang="en-US"/>
+            </a:p>
+          </p:txBody>
         </p:sp>
         <p:sp>
           <p:nvSpPr>
@@ -4165,6 +4372,13 @@
               <a:noFill/>
             </a:ln>
           </p:spPr>
+          <p:txBody>
+            <a:bodyPr/>
+            <a:lstStyle/>
+            <a:p>
+              <a:endParaRPr lang="zh-CN" altLang="en-US"/>
+            </a:p>
+          </p:txBody>
         </p:sp>
         <p:grpSp>
           <p:nvGrpSpPr>
@@ -4232,6 +4446,13 @@
                 </a:solidFill>
               </a:ln>
             </p:spPr>
+            <p:txBody>
+              <a:bodyPr/>
+              <a:lstStyle/>
+              <a:p>
+                <a:endParaRPr lang="zh-CN" altLang="en-US"/>
+              </a:p>
+            </p:txBody>
           </p:sp>
           <p:sp>
             <p:nvSpPr>
@@ -4284,6 +4505,13 @@
                 </a:solidFill>
               </a:ln>
             </p:spPr>
+            <p:txBody>
+              <a:bodyPr/>
+              <a:lstStyle/>
+              <a:p>
+                <a:endParaRPr lang="zh-CN" altLang="en-US"/>
+              </a:p>
+            </p:txBody>
           </p:sp>
         </p:grpSp>
         <p:sp>
@@ -4401,6 +4629,13 @@
               </a:solidFill>
             </a:ln>
           </p:spPr>
+          <p:txBody>
+            <a:bodyPr/>
+            <a:lstStyle/>
+            <a:p>
+              <a:endParaRPr lang="zh-CN" altLang="en-US"/>
+            </a:p>
+          </p:txBody>
         </p:sp>
         <p:sp>
           <p:nvSpPr>
@@ -4557,6 +4792,13 @@
               </a:solidFill>
             </a:ln>
           </p:spPr>
+          <p:txBody>
+            <a:bodyPr/>
+            <a:lstStyle/>
+            <a:p>
+              <a:endParaRPr lang="zh-CN" altLang="en-US"/>
+            </a:p>
+          </p:txBody>
         </p:sp>
         <p:sp>
           <p:nvSpPr>
@@ -4713,6 +4955,13 @@
               </a:solidFill>
             </a:ln>
           </p:spPr>
+          <p:txBody>
+            <a:bodyPr/>
+            <a:lstStyle/>
+            <a:p>
+              <a:endParaRPr lang="zh-CN" altLang="en-US"/>
+            </a:p>
+          </p:txBody>
         </p:sp>
         <p:sp>
           <p:nvSpPr>
@@ -4834,6 +5083,13 @@
               </a:solidFill>
             </a:ln>
           </p:spPr>
+          <p:txBody>
+            <a:bodyPr/>
+            <a:lstStyle/>
+            <a:p>
+              <a:endParaRPr lang="zh-CN" altLang="en-US"/>
+            </a:p>
+          </p:txBody>
         </p:sp>
         <p:sp>
           <p:nvSpPr>
@@ -4858,6 +5114,13 @@
               <a:noFill/>
             </a:ln>
           </p:spPr>
+          <p:txBody>
+            <a:bodyPr/>
+            <a:lstStyle/>
+            <a:p>
+              <a:endParaRPr lang="zh-CN" altLang="en-US"/>
+            </a:p>
+          </p:txBody>
         </p:sp>
         <p:grpSp>
           <p:nvGrpSpPr>
@@ -4925,6 +5188,13 @@
                 </a:solidFill>
               </a:ln>
             </p:spPr>
+            <p:txBody>
+              <a:bodyPr/>
+              <a:lstStyle/>
+              <a:p>
+                <a:endParaRPr lang="zh-CN" altLang="en-US"/>
+              </a:p>
+            </p:txBody>
           </p:sp>
           <p:sp>
             <p:nvSpPr>
@@ -4974,6 +5244,13 @@
                 </a:solidFill>
               </a:ln>
             </p:spPr>
+            <p:txBody>
+              <a:bodyPr/>
+              <a:lstStyle/>
+              <a:p>
+                <a:endParaRPr lang="zh-CN" altLang="en-US"/>
+              </a:p>
+            </p:txBody>
           </p:sp>
           <p:sp>
             <p:nvSpPr>
@@ -5023,6 +5300,13 @@
                 </a:solidFill>
               </a:ln>
             </p:spPr>
+            <p:txBody>
+              <a:bodyPr/>
+              <a:lstStyle/>
+              <a:p>
+                <a:endParaRPr lang="zh-CN" altLang="en-US"/>
+              </a:p>
+            </p:txBody>
           </p:sp>
         </p:grpSp>
         <p:sp>
@@ -5140,6 +5424,13 @@
               </a:solidFill>
             </a:ln>
           </p:spPr>
+          <p:txBody>
+            <a:bodyPr/>
+            <a:lstStyle/>
+            <a:p>
+              <a:endParaRPr lang="zh-CN" altLang="en-US"/>
+            </a:p>
+          </p:txBody>
         </p:sp>
         <p:sp>
           <p:nvSpPr>
@@ -5296,6 +5587,13 @@
               </a:solidFill>
             </a:ln>
           </p:spPr>
+          <p:txBody>
+            <a:bodyPr/>
+            <a:lstStyle/>
+            <a:p>
+              <a:endParaRPr lang="zh-CN" altLang="en-US"/>
+            </a:p>
+          </p:txBody>
         </p:sp>
         <p:sp>
           <p:nvSpPr>
@@ -5452,6 +5750,13 @@
               </a:solidFill>
             </a:ln>
           </p:spPr>
+          <p:txBody>
+            <a:bodyPr/>
+            <a:lstStyle/>
+            <a:p>
+              <a:endParaRPr lang="zh-CN" altLang="en-US"/>
+            </a:p>
+          </p:txBody>
         </p:sp>
         <p:sp>
           <p:nvSpPr>
@@ -5568,6 +5873,13 @@
               </a:solidFill>
             </a:ln>
           </p:spPr>
+          <p:txBody>
+            <a:bodyPr/>
+            <a:lstStyle/>
+            <a:p>
+              <a:endParaRPr lang="zh-CN" altLang="en-US"/>
+            </a:p>
+          </p:txBody>
         </p:sp>
         <p:sp>
           <p:nvSpPr>
@@ -5689,6 +6001,13 @@
               </a:solidFill>
             </a:ln>
           </p:spPr>
+          <p:txBody>
+            <a:bodyPr/>
+            <a:lstStyle/>
+            <a:p>
+              <a:endParaRPr lang="zh-CN" altLang="en-US"/>
+            </a:p>
+          </p:txBody>
         </p:sp>
         <p:sp>
           <p:nvSpPr>
@@ -5713,6 +6032,13 @@
               <a:noFill/>
             </a:ln>
           </p:spPr>
+          <p:txBody>
+            <a:bodyPr/>
+            <a:lstStyle/>
+            <a:p>
+              <a:endParaRPr lang="zh-CN" altLang="en-US"/>
+            </a:p>
+          </p:txBody>
         </p:sp>
         <p:grpSp>
           <p:nvGrpSpPr>
@@ -5771,6 +6097,13 @@
                 </a:solidFill>
               </a:ln>
             </p:spPr>
+            <p:txBody>
+              <a:bodyPr/>
+              <a:lstStyle/>
+              <a:p>
+                <a:endParaRPr lang="zh-CN" altLang="en-US"/>
+              </a:p>
+            </p:txBody>
           </p:sp>
           <p:sp>
             <p:nvSpPr>
@@ -5834,6 +6167,13 @@
                 </a:solidFill>
               </a:ln>
             </p:spPr>
+            <p:txBody>
+              <a:bodyPr/>
+              <a:lstStyle/>
+              <a:p>
+                <a:endParaRPr lang="zh-CN" altLang="en-US"/>
+              </a:p>
+            </p:txBody>
           </p:sp>
           <p:sp>
             <p:nvSpPr>
@@ -5894,6 +6234,13 @@
                 </a:solidFill>
               </a:ln>
             </p:spPr>
+            <p:txBody>
+              <a:bodyPr/>
+              <a:lstStyle/>
+              <a:p>
+                <a:endParaRPr lang="zh-CN" altLang="en-US"/>
+              </a:p>
+            </p:txBody>
           </p:sp>
         </p:grpSp>
         <p:sp>
@@ -6011,6 +6358,13 @@
               </a:solidFill>
             </a:ln>
           </p:spPr>
+          <p:txBody>
+            <a:bodyPr/>
+            <a:lstStyle/>
+            <a:p>
+              <a:endParaRPr lang="zh-CN" altLang="en-US"/>
+            </a:p>
+          </p:txBody>
         </p:sp>
         <p:sp>
           <p:nvSpPr>
@@ -6167,6 +6521,13 @@
               </a:solidFill>
             </a:ln>
           </p:spPr>
+          <p:txBody>
+            <a:bodyPr/>
+            <a:lstStyle/>
+            <a:p>
+              <a:endParaRPr lang="zh-CN" altLang="en-US"/>
+            </a:p>
+          </p:txBody>
         </p:sp>
         <p:sp>
           <p:nvSpPr>
@@ -6323,6 +6684,13 @@
               </a:solidFill>
             </a:ln>
           </p:spPr>
+          <p:txBody>
+            <a:bodyPr/>
+            <a:lstStyle/>
+            <a:p>
+              <a:endParaRPr lang="zh-CN" altLang="en-US"/>
+            </a:p>
+          </p:txBody>
         </p:sp>
         <p:sp>
           <p:nvSpPr>
@@ -6479,6 +6847,13 @@
               </a:solidFill>
             </a:ln>
           </p:spPr>
+          <p:txBody>
+            <a:bodyPr/>
+            <a:lstStyle/>
+            <a:p>
+              <a:endParaRPr lang="zh-CN" altLang="en-US"/>
+            </a:p>
+          </p:txBody>
         </p:sp>
         <p:sp>
           <p:nvSpPr>
@@ -6600,6 +6975,13 @@
               </a:solidFill>
             </a:ln>
           </p:spPr>
+          <p:txBody>
+            <a:bodyPr/>
+            <a:lstStyle/>
+            <a:p>
+              <a:endParaRPr lang="zh-CN" altLang="en-US"/>
+            </a:p>
+          </p:txBody>
         </p:sp>
         <p:sp>
           <p:nvSpPr>
@@ -6624,6 +7006,13 @@
               <a:noFill/>
             </a:ln>
           </p:spPr>
+          <p:txBody>
+            <a:bodyPr/>
+            <a:lstStyle/>
+            <a:p>
+              <a:endParaRPr lang="zh-CN" altLang="en-US"/>
+            </a:p>
+          </p:txBody>
         </p:sp>
         <p:grpSp>
           <p:nvGrpSpPr>
@@ -6701,6 +7090,13 @@
                 </a:solidFill>
               </a:ln>
             </p:spPr>
+            <p:txBody>
+              <a:bodyPr/>
+              <a:lstStyle/>
+              <a:p>
+                <a:endParaRPr lang="zh-CN" altLang="en-US"/>
+              </a:p>
+            </p:txBody>
           </p:sp>
           <p:sp>
             <p:nvSpPr>
@@ -6759,6 +7155,13 @@
                 </a:solidFill>
               </a:ln>
             </p:spPr>
+            <p:txBody>
+              <a:bodyPr/>
+              <a:lstStyle/>
+              <a:p>
+                <a:endParaRPr lang="zh-CN" altLang="en-US"/>
+              </a:p>
+            </p:txBody>
           </p:sp>
         </p:grpSp>
         <p:sp>
@@ -6876,6 +7279,13 @@
               </a:solidFill>
             </a:ln>
           </p:spPr>
+          <p:txBody>
+            <a:bodyPr/>
+            <a:lstStyle/>
+            <a:p>
+              <a:endParaRPr lang="zh-CN" altLang="en-US"/>
+            </a:p>
+          </p:txBody>
         </p:sp>
         <p:sp>
           <p:nvSpPr>
@@ -7032,6 +7442,13 @@
               </a:solidFill>
             </a:ln>
           </p:spPr>
+          <p:txBody>
+            <a:bodyPr/>
+            <a:lstStyle/>
+            <a:p>
+              <a:endParaRPr lang="zh-CN" altLang="en-US"/>
+            </a:p>
+          </p:txBody>
         </p:sp>
         <p:sp>
           <p:nvSpPr>
@@ -7188,6 +7605,13 @@
               </a:solidFill>
             </a:ln>
           </p:spPr>
+          <p:txBody>
+            <a:bodyPr/>
+            <a:lstStyle/>
+            <a:p>
+              <a:endParaRPr lang="zh-CN" altLang="en-US"/>
+            </a:p>
+          </p:txBody>
         </p:sp>
         <p:sp>
           <p:nvSpPr>
@@ -7344,6 +7768,13 @@
               </a:solidFill>
             </a:ln>
           </p:spPr>
+          <p:txBody>
+            <a:bodyPr/>
+            <a:lstStyle/>
+            <a:p>
+              <a:endParaRPr lang="zh-CN" altLang="en-US"/>
+            </a:p>
+          </p:txBody>
         </p:sp>
         <p:sp>
           <p:nvSpPr>
@@ -7465,6 +7896,13 @@
               </a:solidFill>
             </a:ln>
           </p:spPr>
+          <p:txBody>
+            <a:bodyPr/>
+            <a:lstStyle/>
+            <a:p>
+              <a:endParaRPr lang="zh-CN" altLang="en-US"/>
+            </a:p>
+          </p:txBody>
         </p:sp>
         <p:sp>
           <p:nvSpPr>
@@ -7489,6 +7927,13 @@
               <a:noFill/>
             </a:ln>
           </p:spPr>
+          <p:txBody>
+            <a:bodyPr/>
+            <a:lstStyle/>
+            <a:p>
+              <a:endParaRPr lang="zh-CN" altLang="en-US"/>
+            </a:p>
+          </p:txBody>
         </p:sp>
         <p:grpSp>
           <p:nvGrpSpPr>
@@ -7566,6 +8011,13 @@
                 </a:solidFill>
               </a:ln>
             </p:spPr>
+            <p:txBody>
+              <a:bodyPr/>
+              <a:lstStyle/>
+              <a:p>
+                <a:endParaRPr lang="zh-CN" altLang="en-US"/>
+              </a:p>
+            </p:txBody>
           </p:sp>
           <p:sp>
             <p:nvSpPr>
@@ -7624,6 +8076,13 @@
                 </a:solidFill>
               </a:ln>
             </p:spPr>
+            <p:txBody>
+              <a:bodyPr/>
+              <a:lstStyle/>
+              <a:p>
+                <a:endParaRPr lang="zh-CN" altLang="en-US"/>
+              </a:p>
+            </p:txBody>
           </p:sp>
         </p:grpSp>
         <p:sp>
@@ -7741,6 +8200,13 @@
               </a:solidFill>
             </a:ln>
           </p:spPr>
+          <p:txBody>
+            <a:bodyPr/>
+            <a:lstStyle/>
+            <a:p>
+              <a:endParaRPr lang="zh-CN" altLang="en-US"/>
+            </a:p>
+          </p:txBody>
         </p:sp>
         <p:sp>
           <p:nvSpPr>
@@ -7897,6 +8363,13 @@
               </a:solidFill>
             </a:ln>
           </p:spPr>
+          <p:txBody>
+            <a:bodyPr/>
+            <a:lstStyle/>
+            <a:p>
+              <a:endParaRPr lang="zh-CN" altLang="en-US"/>
+            </a:p>
+          </p:txBody>
         </p:sp>
         <p:sp>
           <p:nvSpPr>
@@ -8053,6 +8526,13 @@
               </a:solidFill>
             </a:ln>
           </p:spPr>
+          <p:txBody>
+            <a:bodyPr/>
+            <a:lstStyle/>
+            <a:p>
+              <a:endParaRPr lang="zh-CN" altLang="en-US"/>
+            </a:p>
+          </p:txBody>
         </p:sp>
         <p:sp>
           <p:nvSpPr>
@@ -8174,6 +8654,13 @@
               </a:solidFill>
             </a:ln>
           </p:spPr>
+          <p:txBody>
+            <a:bodyPr/>
+            <a:lstStyle/>
+            <a:p>
+              <a:endParaRPr lang="zh-CN" altLang="en-US"/>
+            </a:p>
+          </p:txBody>
         </p:sp>
         <p:sp>
           <p:nvSpPr>
@@ -8198,6 +8685,13 @@
               <a:noFill/>
             </a:ln>
           </p:spPr>
+          <p:txBody>
+            <a:bodyPr/>
+            <a:lstStyle/>
+            <a:p>
+              <a:endParaRPr lang="zh-CN" altLang="en-US"/>
+            </a:p>
+          </p:txBody>
         </p:sp>
         <p:grpSp>
           <p:nvGrpSpPr>
@@ -8248,6 +8742,13 @@
                 </a:solidFill>
               </a:ln>
             </p:spPr>
+            <p:txBody>
+              <a:bodyPr/>
+              <a:lstStyle/>
+              <a:p>
+                <a:endParaRPr lang="zh-CN" altLang="en-US"/>
+              </a:p>
+            </p:txBody>
           </p:sp>
           <p:sp>
             <p:nvSpPr>
@@ -8297,6 +8798,13 @@
                 </a:solidFill>
               </a:ln>
             </p:spPr>
+            <p:txBody>
+              <a:bodyPr/>
+              <a:lstStyle/>
+              <a:p>
+                <a:endParaRPr lang="zh-CN" altLang="en-US"/>
+              </a:p>
+            </p:txBody>
           </p:sp>
           <p:sp>
             <p:nvSpPr>
@@ -8351,6 +8859,13 @@
                 </a:solidFill>
               </a:ln>
             </p:spPr>
+            <p:txBody>
+              <a:bodyPr/>
+              <a:lstStyle/>
+              <a:p>
+                <a:endParaRPr lang="zh-CN" altLang="en-US"/>
+              </a:p>
+            </p:txBody>
           </p:sp>
         </p:grpSp>
         <p:sp>
@@ -8468,6 +8983,13 @@
               </a:solidFill>
             </a:ln>
           </p:spPr>
+          <p:txBody>
+            <a:bodyPr/>
+            <a:lstStyle/>
+            <a:p>
+              <a:endParaRPr lang="zh-CN" altLang="en-US"/>
+            </a:p>
+          </p:txBody>
         </p:sp>
         <p:sp>
           <p:nvSpPr>
@@ -8624,6 +9146,13 @@
               </a:solidFill>
             </a:ln>
           </p:spPr>
+          <p:txBody>
+            <a:bodyPr/>
+            <a:lstStyle/>
+            <a:p>
+              <a:endParaRPr lang="zh-CN" altLang="en-US"/>
+            </a:p>
+          </p:txBody>
         </p:sp>
         <p:sp>
           <p:nvSpPr>
@@ -8782,6 +9311,13 @@
               <a:tailEnd type="triangle" w="lg" len="lg"/>
             </a:ln>
           </p:spPr>
+          <p:txBody>
+            <a:bodyPr/>
+            <a:lstStyle/>
+            <a:p>
+              <a:endParaRPr lang="zh-CN" altLang="en-US"/>
+            </a:p>
+          </p:txBody>
         </p:sp>
         <p:sp>
           <p:nvSpPr>
@@ -8808,6 +9344,13 @@
               <a:noFill/>
             </a:ln>
           </p:spPr>
+          <p:txBody>
+            <a:bodyPr/>
+            <a:lstStyle/>
+            <a:p>
+              <a:endParaRPr lang="zh-CN" altLang="en-US"/>
+            </a:p>
+          </p:txBody>
         </p:sp>
         <p:sp>
           <p:nvSpPr>
@@ -8871,6 +9414,13 @@
               <a:tailEnd type="triangle" w="lg" len="lg"/>
             </a:ln>
           </p:spPr>
+          <p:txBody>
+            <a:bodyPr/>
+            <a:lstStyle/>
+            <a:p>
+              <a:endParaRPr lang="zh-CN" altLang="en-US"/>
+            </a:p>
+          </p:txBody>
         </p:sp>
         <p:sp>
           <p:nvSpPr>
@@ -8897,6 +9447,13 @@
               <a:noFill/>
             </a:ln>
           </p:spPr>
+          <p:txBody>
+            <a:bodyPr/>
+            <a:lstStyle/>
+            <a:p>
+              <a:endParaRPr lang="zh-CN" altLang="en-US"/>
+            </a:p>
+          </p:txBody>
         </p:sp>
         <p:sp>
           <p:nvSpPr>
@@ -8979,6 +9536,13 @@
               <a:tailEnd type="triangle" w="lg" len="lg"/>
             </a:ln>
           </p:spPr>
+          <p:txBody>
+            <a:bodyPr/>
+            <a:lstStyle/>
+            <a:p>
+              <a:endParaRPr lang="zh-CN" altLang="en-US"/>
+            </a:p>
+          </p:txBody>
         </p:sp>
         <p:sp>
           <p:nvSpPr>
@@ -9002,6 +9566,13 @@
               <a:tailEnd type="triangle" w="lg" len="lg"/>
             </a:ln>
           </p:spPr>
+          <p:txBody>
+            <a:bodyPr/>
+            <a:lstStyle/>
+            <a:p>
+              <a:endParaRPr lang="zh-CN" altLang="en-US"/>
+            </a:p>
+          </p:txBody>
         </p:sp>
         <p:sp>
           <p:nvSpPr>
@@ -9028,6 +9599,13 @@
               <a:noFill/>
             </a:ln>
           </p:spPr>
+          <p:txBody>
+            <a:bodyPr/>
+            <a:lstStyle/>
+            <a:p>
+              <a:endParaRPr lang="zh-CN" altLang="en-US"/>
+            </a:p>
+          </p:txBody>
         </p:sp>
         <p:sp>
           <p:nvSpPr>
@@ -9144,6 +9722,13 @@
               </a:solidFill>
             </a:ln>
           </p:spPr>
+          <p:txBody>
+            <a:bodyPr/>
+            <a:lstStyle/>
+            <a:p>
+              <a:endParaRPr lang="zh-CN" altLang="en-US"/>
+            </a:p>
+          </p:txBody>
         </p:sp>
         <p:sp>
           <p:nvSpPr>
@@ -9330,6 +9915,13 @@
               <a:noFill/>
             </a:ln>
           </p:spPr>
+          <p:txBody>
+            <a:bodyPr/>
+            <a:lstStyle/>
+            <a:p>
+              <a:endParaRPr lang="zh-CN" altLang="en-US"/>
+            </a:p>
+          </p:txBody>
         </p:sp>
         <p:grpSp>
           <p:nvGrpSpPr>
@@ -9409,6 +10001,13 @@
                 </a:solidFill>
               </a:ln>
             </p:spPr>
+            <p:txBody>
+              <a:bodyPr/>
+              <a:lstStyle/>
+              <a:p>
+                <a:endParaRPr lang="zh-CN" altLang="en-US"/>
+              </a:p>
+            </p:txBody>
           </p:sp>
           <p:sp>
             <p:nvSpPr>
@@ -9462,6 +10061,13 @@
                 </a:solidFill>
               </a:ln>
             </p:spPr>
+            <p:txBody>
+              <a:bodyPr/>
+              <a:lstStyle/>
+              <a:p>
+                <a:endParaRPr lang="zh-CN" altLang="en-US"/>
+              </a:p>
+            </p:txBody>
           </p:sp>
           <p:sp>
             <p:nvSpPr>
@@ -9511,6 +10117,13 @@
                 </a:solidFill>
               </a:ln>
             </p:spPr>
+            <p:txBody>
+              <a:bodyPr/>
+              <a:lstStyle/>
+              <a:p>
+                <a:endParaRPr lang="zh-CN" altLang="en-US"/>
+              </a:p>
+            </p:txBody>
           </p:sp>
         </p:grpSp>
         <p:sp>
@@ -9550,18 +10163,7 @@
                   <a:ea typeface="Microsoft YaHei"/>
                   <a:cs typeface="Arial"/>
                 </a:rPr>
-                <a:t>DDL 无外键约束</a:t>
-              </a:r>
-              <a:r>
-                <a:rPr lang="zh-CN" sz="900" b="1" dirty="0">
-                  <a:solidFill>
-                    <a:srgbClr val="F08080"/>
-                  </a:solidFill>
-                  <a:latin typeface="Arial"/>
-                  <a:ea typeface="Microsoft YaHei"/>
-                  <a:cs typeface="Arial"/>
-                </a:rPr>
-                <a:t>跨表完整性由应用层负责</a:t>
+                <a:t>DDL 无外键约束跨表完整性由应用层负责</a:t>
               </a:r>
             </a:p>
           </p:txBody>
@@ -9616,6 +10218,13 @@
               </a:solidFill>
             </a:ln>
           </p:spPr>
+          <p:txBody>
+            <a:bodyPr/>
+            <a:lstStyle/>
+            <a:p>
+              <a:endParaRPr lang="zh-CN" altLang="en-US"/>
+            </a:p>
+          </p:txBody>
         </p:sp>
         <p:sp>
           <p:nvSpPr>
@@ -9703,9 +10312,18 @@
   <p:clrMapOvr>
     <a:masterClrMapping/>
   </p:clrMapOvr>
-  <p:transition xmlns:p14="http://schemas.microsoft.com/office/powerpoint/2010/main" p14:dur="400">
-    <p:fade/>
-  </p:transition>
+  <mc:AlternateContent xmlns:mc="http://schemas.openxmlformats.org/markup-compatibility/2006">
+    <mc:Choice xmlns:p14="http://schemas.microsoft.com/office/powerpoint/2010/main" Requires="p14">
+      <p:transition p14:dur="400">
+        <p:fade/>
+      </p:transition>
+    </mc:Choice>
+    <mc:Fallback>
+      <p:transition>
+        <p:fade/>
+      </p:transition>
+    </mc:Fallback>
+  </mc:AlternateContent>
   <p:timing>
     <p:tnLst>
       <p:par>
@@ -10165,6 +10783,13 @@
               <a:noFill/>
             </a:ln>
           </p:spPr>
+          <p:txBody>
+            <a:bodyPr/>
+            <a:lstStyle/>
+            <a:p>
+              <a:endParaRPr lang="zh-CN" altLang="en-US"/>
+            </a:p>
+          </p:txBody>
         </p:sp>
         <p:sp>
           <p:nvSpPr>
@@ -10187,6 +10812,13 @@
               <a:noFill/>
             </a:ln>
           </p:spPr>
+          <p:txBody>
+            <a:bodyPr/>
+            <a:lstStyle/>
+            <a:p>
+              <a:endParaRPr lang="zh-CN" altLang="en-US"/>
+            </a:p>
+          </p:txBody>
         </p:sp>
         <p:sp>
           <p:nvSpPr>
@@ -10211,6 +10843,13 @@
               <a:noFill/>
             </a:ln>
           </p:spPr>
+          <p:txBody>
+            <a:bodyPr/>
+            <a:lstStyle/>
+            <a:p>
+              <a:endParaRPr lang="zh-CN" altLang="en-US"/>
+            </a:p>
+          </p:txBody>
         </p:sp>
         <p:sp>
           <p:nvSpPr>
@@ -10235,6 +10874,13 @@
               <a:noFill/>
             </a:ln>
           </p:spPr>
+          <p:txBody>
+            <a:bodyPr/>
+            <a:lstStyle/>
+            <a:p>
+              <a:endParaRPr lang="zh-CN" altLang="en-US"/>
+            </a:p>
+          </p:txBody>
         </p:sp>
       </p:grpSp>
       <p:grpSp>
@@ -10446,6 +11092,13 @@
               </a:solidFill>
             </a:ln>
           </p:spPr>
+          <p:txBody>
+            <a:bodyPr/>
+            <a:lstStyle/>
+            <a:p>
+              <a:endParaRPr lang="zh-CN" altLang="en-US"/>
+            </a:p>
+          </p:txBody>
         </p:sp>
       </p:grpSp>
       <p:grpSp>
@@ -10487,6 +11140,13 @@
               </a:solidFill>
             </a:ln>
           </p:spPr>
+          <p:txBody>
+            <a:bodyPr/>
+            <a:lstStyle/>
+            <a:p>
+              <a:endParaRPr lang="zh-CN" altLang="en-US"/>
+            </a:p>
+          </p:txBody>
         </p:sp>
         <p:sp>
           <p:nvSpPr>
@@ -10603,6 +11263,13 @@
               </a:solidFill>
             </a:ln>
           </p:spPr>
+          <p:txBody>
+            <a:bodyPr/>
+            <a:lstStyle/>
+            <a:p>
+              <a:endParaRPr lang="zh-CN" altLang="en-US"/>
+            </a:p>
+          </p:txBody>
         </p:sp>
       </p:grpSp>
       <p:grpSp>
@@ -10644,6 +11311,13 @@
               </a:solidFill>
             </a:ln>
           </p:spPr>
+          <p:txBody>
+            <a:bodyPr/>
+            <a:lstStyle/>
+            <a:p>
+              <a:endParaRPr lang="zh-CN" altLang="en-US"/>
+            </a:p>
+          </p:txBody>
         </p:sp>
         <p:sp>
           <p:nvSpPr>
@@ -10668,6 +11342,13 @@
               <a:noFill/>
             </a:ln>
           </p:spPr>
+          <p:txBody>
+            <a:bodyPr/>
+            <a:lstStyle/>
+            <a:p>
+              <a:endParaRPr lang="zh-CN" altLang="en-US"/>
+            </a:p>
+          </p:txBody>
         </p:sp>
         <p:sp>
           <p:nvSpPr>
@@ -10694,6 +11375,13 @@
               <a:noFill/>
             </a:ln>
           </p:spPr>
+          <p:txBody>
+            <a:bodyPr/>
+            <a:lstStyle/>
+            <a:p>
+              <a:endParaRPr lang="zh-CN" altLang="en-US"/>
+            </a:p>
+          </p:txBody>
         </p:sp>
         <p:sp>
           <p:nvSpPr>
@@ -10801,6 +11489,13 @@
                 </a:solidFill>
               </a:ln>
             </p:spPr>
+            <p:txBody>
+              <a:bodyPr/>
+              <a:lstStyle/>
+              <a:p>
+                <a:endParaRPr lang="zh-CN" altLang="en-US"/>
+              </a:p>
+            </p:txBody>
           </p:sp>
           <p:sp>
             <p:nvSpPr>
@@ -10837,6 +11532,13 @@
                 </a:solidFill>
               </a:ln>
             </p:spPr>
+            <p:txBody>
+              <a:bodyPr/>
+              <a:lstStyle/>
+              <a:p>
+                <a:endParaRPr lang="zh-CN" altLang="en-US"/>
+              </a:p>
+            </p:txBody>
           </p:sp>
         </p:grpSp>
         <p:sp>
@@ -10959,6 +11661,13 @@
               </a:solidFill>
             </a:ln>
           </p:spPr>
+          <p:txBody>
+            <a:bodyPr/>
+            <a:lstStyle/>
+            <a:p>
+              <a:endParaRPr lang="zh-CN" altLang="en-US"/>
+            </a:p>
+          </p:txBody>
         </p:sp>
         <p:sp>
           <p:nvSpPr>
@@ -10983,6 +11692,13 @@
               <a:noFill/>
             </a:ln>
           </p:spPr>
+          <p:txBody>
+            <a:bodyPr/>
+            <a:lstStyle/>
+            <a:p>
+              <a:endParaRPr lang="zh-CN" altLang="en-US"/>
+            </a:p>
+          </p:txBody>
         </p:sp>
         <p:sp>
           <p:nvSpPr>
@@ -11009,6 +11725,13 @@
               <a:noFill/>
             </a:ln>
           </p:spPr>
+          <p:txBody>
+            <a:bodyPr/>
+            <a:lstStyle/>
+            <a:p>
+              <a:endParaRPr lang="zh-CN" altLang="en-US"/>
+            </a:p>
+          </p:txBody>
         </p:sp>
         <p:sp>
           <p:nvSpPr>
@@ -11128,6 +11851,13 @@
                 </a:solidFill>
               </a:ln>
             </p:spPr>
+            <p:txBody>
+              <a:bodyPr/>
+              <a:lstStyle/>
+              <a:p>
+                <a:endParaRPr lang="zh-CN" altLang="en-US"/>
+              </a:p>
+            </p:txBody>
           </p:sp>
           <p:sp>
             <p:nvSpPr>
@@ -11181,6 +11911,13 @@
                 </a:solidFill>
               </a:ln>
             </p:spPr>
+            <p:txBody>
+              <a:bodyPr/>
+              <a:lstStyle/>
+              <a:p>
+                <a:endParaRPr lang="zh-CN" altLang="en-US"/>
+              </a:p>
+            </p:txBody>
           </p:sp>
           <p:sp>
             <p:nvSpPr>
@@ -11230,6 +11967,13 @@
                 </a:solidFill>
               </a:ln>
             </p:spPr>
+            <p:txBody>
+              <a:bodyPr/>
+              <a:lstStyle/>
+              <a:p>
+                <a:endParaRPr lang="zh-CN" altLang="en-US"/>
+              </a:p>
+            </p:txBody>
           </p:sp>
         </p:grpSp>
         <p:sp>
@@ -11352,6 +12096,13 @@
               </a:solidFill>
             </a:ln>
           </p:spPr>
+          <p:txBody>
+            <a:bodyPr/>
+            <a:lstStyle/>
+            <a:p>
+              <a:endParaRPr lang="zh-CN" altLang="en-US"/>
+            </a:p>
+          </p:txBody>
         </p:sp>
         <p:sp>
           <p:nvSpPr>
@@ -11376,6 +12127,13 @@
               <a:noFill/>
             </a:ln>
           </p:spPr>
+          <p:txBody>
+            <a:bodyPr/>
+            <a:lstStyle/>
+            <a:p>
+              <a:endParaRPr lang="zh-CN" altLang="en-US"/>
+            </a:p>
+          </p:txBody>
         </p:sp>
         <p:sp>
           <p:nvSpPr>
@@ -11402,6 +12160,13 @@
               <a:noFill/>
             </a:ln>
           </p:spPr>
+          <p:txBody>
+            <a:bodyPr/>
+            <a:lstStyle/>
+            <a:p>
+              <a:endParaRPr lang="zh-CN" altLang="en-US"/>
+            </a:p>
+          </p:txBody>
         </p:sp>
         <p:sp>
           <p:nvSpPr>
@@ -11509,6 +12274,13 @@
                 </a:solidFill>
               </a:ln>
             </p:spPr>
+            <p:txBody>
+              <a:bodyPr/>
+              <a:lstStyle/>
+              <a:p>
+                <a:endParaRPr lang="zh-CN" altLang="en-US"/>
+              </a:p>
+            </p:txBody>
           </p:sp>
           <p:sp>
             <p:nvSpPr>
@@ -11561,6 +12333,13 @@
                 </a:solidFill>
               </a:ln>
             </p:spPr>
+            <p:txBody>
+              <a:bodyPr/>
+              <a:lstStyle/>
+              <a:p>
+                <a:endParaRPr lang="zh-CN" altLang="en-US"/>
+              </a:p>
+            </p:txBody>
           </p:sp>
         </p:grpSp>
         <p:sp>
@@ -11683,6 +12462,13 @@
               </a:solidFill>
             </a:ln>
           </p:spPr>
+          <p:txBody>
+            <a:bodyPr/>
+            <a:lstStyle/>
+            <a:p>
+              <a:endParaRPr lang="zh-CN" altLang="en-US"/>
+            </a:p>
+          </p:txBody>
         </p:sp>
         <p:sp>
           <p:nvSpPr>
@@ -11707,6 +12493,13 @@
               <a:noFill/>
             </a:ln>
           </p:spPr>
+          <p:txBody>
+            <a:bodyPr/>
+            <a:lstStyle/>
+            <a:p>
+              <a:endParaRPr lang="zh-CN" altLang="en-US"/>
+            </a:p>
+          </p:txBody>
         </p:sp>
         <p:sp>
           <p:nvSpPr>
@@ -11733,6 +12526,13 @@
               <a:noFill/>
             </a:ln>
           </p:spPr>
+          <p:txBody>
+            <a:bodyPr/>
+            <a:lstStyle/>
+            <a:p>
+              <a:endParaRPr lang="zh-CN" altLang="en-US"/>
+            </a:p>
+          </p:txBody>
         </p:sp>
         <p:sp>
           <p:nvSpPr>
@@ -11840,6 +12640,13 @@
                 </a:solidFill>
               </a:ln>
             </p:spPr>
+            <p:txBody>
+              <a:bodyPr/>
+              <a:lstStyle/>
+              <a:p>
+                <a:endParaRPr lang="zh-CN" altLang="en-US"/>
+              </a:p>
+            </p:txBody>
           </p:sp>
           <p:sp>
             <p:nvSpPr>
@@ -11889,6 +12696,13 @@
                 </a:solidFill>
               </a:ln>
             </p:spPr>
+            <p:txBody>
+              <a:bodyPr/>
+              <a:lstStyle/>
+              <a:p>
+                <a:endParaRPr lang="zh-CN" altLang="en-US"/>
+              </a:p>
+            </p:txBody>
           </p:sp>
           <p:sp>
             <p:nvSpPr>
@@ -11938,6 +12752,13 @@
                 </a:solidFill>
               </a:ln>
             </p:spPr>
+            <p:txBody>
+              <a:bodyPr/>
+              <a:lstStyle/>
+              <a:p>
+                <a:endParaRPr lang="zh-CN" altLang="en-US"/>
+              </a:p>
+            </p:txBody>
           </p:sp>
         </p:grpSp>
         <p:sp>
@@ -12057,6 +12878,13 @@
               <a:tailEnd type="triangle" w="lg" len="lg"/>
             </a:ln>
           </p:spPr>
+          <p:txBody>
+            <a:bodyPr/>
+            <a:lstStyle/>
+            <a:p>
+              <a:endParaRPr lang="zh-CN" altLang="en-US"/>
+            </a:p>
+          </p:txBody>
         </p:sp>
         <p:sp>
           <p:nvSpPr>
@@ -12080,6 +12908,13 @@
               <a:tailEnd type="triangle" w="lg" len="lg"/>
             </a:ln>
           </p:spPr>
+          <p:txBody>
+            <a:bodyPr/>
+            <a:lstStyle/>
+            <a:p>
+              <a:endParaRPr lang="zh-CN" altLang="en-US"/>
+            </a:p>
+          </p:txBody>
         </p:sp>
         <p:sp>
           <p:nvSpPr>
@@ -12103,6 +12938,13 @@
               <a:tailEnd type="triangle" w="lg" len="lg"/>
             </a:ln>
           </p:spPr>
+          <p:txBody>
+            <a:bodyPr/>
+            <a:lstStyle/>
+            <a:p>
+              <a:endParaRPr lang="zh-CN" altLang="en-US"/>
+            </a:p>
+          </p:txBody>
         </p:sp>
       </p:grpSp>
       <p:grpSp>
@@ -12144,6 +12986,13 @@
               </a:solidFill>
             </a:ln>
           </p:spPr>
+          <p:txBody>
+            <a:bodyPr/>
+            <a:lstStyle/>
+            <a:p>
+              <a:endParaRPr lang="zh-CN" altLang="en-US"/>
+            </a:p>
+          </p:txBody>
         </p:sp>
         <p:sp>
           <p:nvSpPr>
@@ -12168,6 +13017,13 @@
               <a:noFill/>
             </a:ln>
           </p:spPr>
+          <p:txBody>
+            <a:bodyPr/>
+            <a:lstStyle/>
+            <a:p>
+              <a:endParaRPr lang="zh-CN" altLang="en-US"/>
+            </a:p>
+          </p:txBody>
         </p:sp>
         <p:grpSp>
           <p:nvGrpSpPr>
@@ -12235,6 +13091,13 @@
                 </a:solidFill>
               </a:ln>
             </p:spPr>
+            <p:txBody>
+              <a:bodyPr/>
+              <a:lstStyle/>
+              <a:p>
+                <a:endParaRPr lang="zh-CN" altLang="en-US"/>
+              </a:p>
+            </p:txBody>
           </p:sp>
           <p:sp>
             <p:nvSpPr>
@@ -12287,6 +13150,13 @@
                 </a:solidFill>
               </a:ln>
             </p:spPr>
+            <p:txBody>
+              <a:bodyPr/>
+              <a:lstStyle/>
+              <a:p>
+                <a:endParaRPr lang="zh-CN" altLang="en-US"/>
+              </a:p>
+            </p:txBody>
           </p:sp>
         </p:grpSp>
         <p:sp>
@@ -12404,6 +13274,13 @@
               </a:solidFill>
             </a:ln>
           </p:spPr>
+          <p:txBody>
+            <a:bodyPr/>
+            <a:lstStyle/>
+            <a:p>
+              <a:endParaRPr lang="zh-CN" altLang="en-US"/>
+            </a:p>
+          </p:txBody>
         </p:sp>
         <p:sp>
           <p:nvSpPr>
@@ -12560,6 +13437,13 @@
               </a:solidFill>
             </a:ln>
           </p:spPr>
+          <p:txBody>
+            <a:bodyPr/>
+            <a:lstStyle/>
+            <a:p>
+              <a:endParaRPr lang="zh-CN" altLang="en-US"/>
+            </a:p>
+          </p:txBody>
         </p:sp>
         <p:sp>
           <p:nvSpPr>
@@ -12676,6 +13560,13 @@
               </a:solidFill>
             </a:ln>
           </p:spPr>
+          <p:txBody>
+            <a:bodyPr/>
+            <a:lstStyle/>
+            <a:p>
+              <a:endParaRPr lang="zh-CN" altLang="en-US"/>
+            </a:p>
+          </p:txBody>
         </p:sp>
         <p:sp>
           <p:nvSpPr>
@@ -12837,6 +13728,13 @@
               </a:solidFill>
             </a:ln>
           </p:spPr>
+          <p:txBody>
+            <a:bodyPr/>
+            <a:lstStyle/>
+            <a:p>
+              <a:endParaRPr lang="zh-CN" altLang="en-US"/>
+            </a:p>
+          </p:txBody>
         </p:sp>
         <p:sp>
           <p:nvSpPr>
@@ -12861,6 +13759,13 @@
               <a:noFill/>
             </a:ln>
           </p:spPr>
+          <p:txBody>
+            <a:bodyPr/>
+            <a:lstStyle/>
+            <a:p>
+              <a:endParaRPr lang="zh-CN" altLang="en-US"/>
+            </a:p>
+          </p:txBody>
         </p:sp>
         <p:grpSp>
           <p:nvGrpSpPr>
@@ -12928,6 +13833,13 @@
                 </a:solidFill>
               </a:ln>
             </p:spPr>
+            <p:txBody>
+              <a:bodyPr/>
+              <a:lstStyle/>
+              <a:p>
+                <a:endParaRPr lang="zh-CN" altLang="en-US"/>
+              </a:p>
+            </p:txBody>
           </p:sp>
           <p:sp>
             <p:nvSpPr>
@@ -12977,6 +13889,13 @@
                 </a:solidFill>
               </a:ln>
             </p:spPr>
+            <p:txBody>
+              <a:bodyPr/>
+              <a:lstStyle/>
+              <a:p>
+                <a:endParaRPr lang="zh-CN" altLang="en-US"/>
+              </a:p>
+            </p:txBody>
           </p:sp>
           <p:sp>
             <p:nvSpPr>
@@ -13026,6 +13945,13 @@
                 </a:solidFill>
               </a:ln>
             </p:spPr>
+            <p:txBody>
+              <a:bodyPr/>
+              <a:lstStyle/>
+              <a:p>
+                <a:endParaRPr lang="zh-CN" altLang="en-US"/>
+              </a:p>
+            </p:txBody>
           </p:sp>
         </p:grpSp>
         <p:sp>
@@ -13143,6 +14069,13 @@
               </a:solidFill>
             </a:ln>
           </p:spPr>
+          <p:txBody>
+            <a:bodyPr/>
+            <a:lstStyle/>
+            <a:p>
+              <a:endParaRPr lang="zh-CN" altLang="en-US"/>
+            </a:p>
+          </p:txBody>
         </p:sp>
         <p:sp>
           <p:nvSpPr>
@@ -13299,6 +14232,13 @@
               </a:solidFill>
             </a:ln>
           </p:spPr>
+          <p:txBody>
+            <a:bodyPr/>
+            <a:lstStyle/>
+            <a:p>
+              <a:endParaRPr lang="zh-CN" altLang="en-US"/>
+            </a:p>
+          </p:txBody>
         </p:sp>
         <p:sp>
           <p:nvSpPr>
@@ -13455,6 +14395,13 @@
               </a:solidFill>
             </a:ln>
           </p:spPr>
+          <p:txBody>
+            <a:bodyPr/>
+            <a:lstStyle/>
+            <a:p>
+              <a:endParaRPr lang="zh-CN" altLang="en-US"/>
+            </a:p>
+          </p:txBody>
         </p:sp>
         <p:sp>
           <p:nvSpPr>
@@ -13616,6 +14563,13 @@
               </a:solidFill>
             </a:ln>
           </p:spPr>
+          <p:txBody>
+            <a:bodyPr/>
+            <a:lstStyle/>
+            <a:p>
+              <a:endParaRPr lang="zh-CN" altLang="en-US"/>
+            </a:p>
+          </p:txBody>
         </p:sp>
         <p:sp>
           <p:nvSpPr>
@@ -13655,6 +14609,13 @@
               </a:solidFill>
             </a:ln>
           </p:spPr>
+          <p:txBody>
+            <a:bodyPr/>
+            <a:lstStyle/>
+            <a:p>
+              <a:endParaRPr lang="zh-CN" altLang="en-US"/>
+            </a:p>
+          </p:txBody>
         </p:sp>
         <p:sp>
           <p:nvSpPr>
@@ -13814,6 +14775,13 @@
                 </a:solidFill>
               </a:ln>
             </p:spPr>
+            <p:txBody>
+              <a:bodyPr/>
+              <a:lstStyle/>
+              <a:p>
+                <a:endParaRPr lang="zh-CN" altLang="en-US"/>
+              </a:p>
+            </p:txBody>
           </p:sp>
           <p:sp>
             <p:nvSpPr>
@@ -13867,6 +14835,13 @@
                 </a:solidFill>
               </a:ln>
             </p:spPr>
+            <p:txBody>
+              <a:bodyPr/>
+              <a:lstStyle/>
+              <a:p>
+                <a:endParaRPr lang="zh-CN" altLang="en-US"/>
+              </a:p>
+            </p:txBody>
           </p:sp>
           <p:sp>
             <p:nvSpPr>
@@ -13916,6 +14891,13 @@
                 </a:solidFill>
               </a:ln>
             </p:spPr>
+            <p:txBody>
+              <a:bodyPr/>
+              <a:lstStyle/>
+              <a:p>
+                <a:endParaRPr lang="zh-CN" altLang="en-US"/>
+              </a:p>
+            </p:txBody>
           </p:sp>
         </p:grpSp>
         <p:sp>
@@ -14023,6 +15005,13 @@
               <a:noFill/>
             </a:ln>
           </p:spPr>
+          <p:txBody>
+            <a:bodyPr/>
+            <a:lstStyle/>
+            <a:p>
+              <a:endParaRPr lang="zh-CN" altLang="en-US"/>
+            </a:p>
+          </p:txBody>
         </p:sp>
         <p:sp>
           <p:nvSpPr>
@@ -14101,18 +15090,7 @@
                   <a:ea typeface="Microsoft YaHei"/>
                   <a:cs typeface="Arial"/>
                 </a:rPr>
-                <a:t>任一步失败则整体回滚</a:t>
-              </a:r>
-              <a:r>
-                <a:rPr lang="zh-CN" sz="1050" b="1" dirty="0">
-                  <a:solidFill>
-                    <a:srgbClr val="F5F7FA"/>
-                  </a:solidFill>
-                  <a:latin typeface="Arial"/>
-                  <a:ea typeface="Microsoft YaHei"/>
-                  <a:cs typeface="Arial"/>
-                </a:rPr>
-                <a:t>避免“有用户、无默认库”</a:t>
+                <a:t>任一步失败则整体回滚避免“有用户、无默认库”</a:t>
               </a:r>
             </a:p>
           </p:txBody>
@@ -14167,6 +15145,13 @@
               </a:solidFill>
             </a:ln>
           </p:spPr>
+          <p:txBody>
+            <a:bodyPr/>
+            <a:lstStyle/>
+            <a:p>
+              <a:endParaRPr lang="zh-CN" altLang="en-US"/>
+            </a:p>
+          </p:txBody>
         </p:sp>
         <p:sp>
           <p:nvSpPr>
@@ -14254,9 +15239,18 @@
   <p:clrMapOvr>
     <a:masterClrMapping/>
   </p:clrMapOvr>
-  <p:transition xmlns:p14="http://schemas.microsoft.com/office/powerpoint/2010/main" p14:dur="400">
-    <p:fade/>
-  </p:transition>
+  <mc:AlternateContent xmlns:mc="http://schemas.openxmlformats.org/markup-compatibility/2006">
+    <mc:Choice xmlns:p14="http://schemas.microsoft.com/office/powerpoint/2010/main" Requires="p14">
+      <p:transition p14:dur="400">
+        <p:fade/>
+      </p:transition>
+    </mc:Choice>
+    <mc:Fallback>
+      <p:transition>
+        <p:fade/>
+      </p:transition>
+    </mc:Fallback>
+  </mc:AlternateContent>
   <p:timing>
     <p:tnLst>
       <p:par>
@@ -14761,6 +15755,13 @@
               <a:noFill/>
             </a:ln>
           </p:spPr>
+          <p:txBody>
+            <a:bodyPr/>
+            <a:lstStyle/>
+            <a:p>
+              <a:endParaRPr lang="zh-CN" altLang="en-US"/>
+            </a:p>
+          </p:txBody>
         </p:sp>
         <p:sp>
           <p:nvSpPr>
@@ -14783,6 +15784,13 @@
               <a:noFill/>
             </a:ln>
           </p:spPr>
+          <p:txBody>
+            <a:bodyPr/>
+            <a:lstStyle/>
+            <a:p>
+              <a:endParaRPr lang="zh-CN" altLang="en-US"/>
+            </a:p>
+          </p:txBody>
         </p:sp>
         <p:sp>
           <p:nvSpPr>
@@ -14807,6 +15815,13 @@
               <a:noFill/>
             </a:ln>
           </p:spPr>
+          <p:txBody>
+            <a:bodyPr/>
+            <a:lstStyle/>
+            <a:p>
+              <a:endParaRPr lang="zh-CN" altLang="en-US"/>
+            </a:p>
+          </p:txBody>
         </p:sp>
         <p:sp>
           <p:nvSpPr>
@@ -14831,6 +15846,13 @@
               <a:noFill/>
             </a:ln>
           </p:spPr>
+          <p:txBody>
+            <a:bodyPr/>
+            <a:lstStyle/>
+            <a:p>
+              <a:endParaRPr lang="zh-CN" altLang="en-US"/>
+            </a:p>
+          </p:txBody>
         </p:sp>
       </p:grpSp>
       <p:grpSp>
@@ -15042,6 +16064,13 @@
               </a:solidFill>
             </a:ln>
           </p:spPr>
+          <p:txBody>
+            <a:bodyPr/>
+            <a:lstStyle/>
+            <a:p>
+              <a:endParaRPr lang="zh-CN" altLang="en-US"/>
+            </a:p>
+          </p:txBody>
         </p:sp>
       </p:grpSp>
       <p:grpSp>
@@ -15083,6 +16112,13 @@
               </a:solidFill>
             </a:ln>
           </p:spPr>
+          <p:txBody>
+            <a:bodyPr/>
+            <a:lstStyle/>
+            <a:p>
+              <a:endParaRPr lang="zh-CN" altLang="en-US"/>
+            </a:p>
+          </p:txBody>
         </p:sp>
         <p:sp>
           <p:nvSpPr>
@@ -15107,6 +16143,13 @@
               <a:noFill/>
             </a:ln>
           </p:spPr>
+          <p:txBody>
+            <a:bodyPr/>
+            <a:lstStyle/>
+            <a:p>
+              <a:endParaRPr lang="zh-CN" altLang="en-US"/>
+            </a:p>
+          </p:txBody>
         </p:sp>
         <p:sp>
           <p:nvSpPr>
@@ -15214,6 +16257,13 @@
                 </a:solidFill>
               </a:ln>
             </p:spPr>
+            <p:txBody>
+              <a:bodyPr/>
+              <a:lstStyle/>
+              <a:p>
+                <a:endParaRPr lang="zh-CN" altLang="en-US"/>
+              </a:p>
+            </p:txBody>
           </p:sp>
           <p:sp>
             <p:nvSpPr>
@@ -15266,6 +16316,13 @@
                 </a:solidFill>
               </a:ln>
             </p:spPr>
+            <p:txBody>
+              <a:bodyPr/>
+              <a:lstStyle/>
+              <a:p>
+                <a:endParaRPr lang="zh-CN" altLang="en-US"/>
+              </a:p>
+            </p:txBody>
           </p:sp>
         </p:grpSp>
         <p:sp>
@@ -15388,6 +16445,13 @@
               </a:solidFill>
             </a:ln>
           </p:spPr>
+          <p:txBody>
+            <a:bodyPr/>
+            <a:lstStyle/>
+            <a:p>
+              <a:endParaRPr lang="zh-CN" altLang="en-US"/>
+            </a:p>
+          </p:txBody>
         </p:sp>
         <p:sp>
           <p:nvSpPr>
@@ -15412,6 +16476,13 @@
               <a:noFill/>
             </a:ln>
           </p:spPr>
+          <p:txBody>
+            <a:bodyPr/>
+            <a:lstStyle/>
+            <a:p>
+              <a:endParaRPr lang="zh-CN" altLang="en-US"/>
+            </a:p>
+          </p:txBody>
         </p:sp>
         <p:sp>
           <p:nvSpPr>
@@ -15519,6 +16590,13 @@
                 </a:solidFill>
               </a:ln>
             </p:spPr>
+            <p:txBody>
+              <a:bodyPr/>
+              <a:lstStyle/>
+              <a:p>
+                <a:endParaRPr lang="zh-CN" altLang="en-US"/>
+              </a:p>
+            </p:txBody>
           </p:sp>
           <p:sp>
             <p:nvSpPr>
@@ -15568,6 +16646,13 @@
                 </a:solidFill>
               </a:ln>
             </p:spPr>
+            <p:txBody>
+              <a:bodyPr/>
+              <a:lstStyle/>
+              <a:p>
+                <a:endParaRPr lang="zh-CN" altLang="en-US"/>
+              </a:p>
+            </p:txBody>
           </p:sp>
           <p:sp>
             <p:nvSpPr>
@@ -15617,6 +16702,13 @@
                 </a:solidFill>
               </a:ln>
             </p:spPr>
+            <p:txBody>
+              <a:bodyPr/>
+              <a:lstStyle/>
+              <a:p>
+                <a:endParaRPr lang="zh-CN" altLang="en-US"/>
+              </a:p>
+            </p:txBody>
           </p:sp>
         </p:grpSp>
         <p:sp>
@@ -15739,6 +16831,13 @@
               </a:solidFill>
             </a:ln>
           </p:spPr>
+          <p:txBody>
+            <a:bodyPr/>
+            <a:lstStyle/>
+            <a:p>
+              <a:endParaRPr lang="zh-CN" altLang="en-US"/>
+            </a:p>
+          </p:txBody>
         </p:sp>
         <p:sp>
           <p:nvSpPr>
@@ -15763,6 +16862,13 @@
               <a:noFill/>
             </a:ln>
           </p:spPr>
+          <p:txBody>
+            <a:bodyPr/>
+            <a:lstStyle/>
+            <a:p>
+              <a:endParaRPr lang="zh-CN" altLang="en-US"/>
+            </a:p>
+          </p:txBody>
         </p:sp>
         <p:sp>
           <p:nvSpPr>
@@ -15880,6 +16986,13 @@
                 </a:solidFill>
               </a:ln>
             </p:spPr>
+            <p:txBody>
+              <a:bodyPr/>
+              <a:lstStyle/>
+              <a:p>
+                <a:endParaRPr lang="zh-CN" altLang="en-US"/>
+              </a:p>
+            </p:txBody>
           </p:sp>
           <p:sp>
             <p:nvSpPr>
@@ -15938,6 +17051,13 @@
                 </a:solidFill>
               </a:ln>
             </p:spPr>
+            <p:txBody>
+              <a:bodyPr/>
+              <a:lstStyle/>
+              <a:p>
+                <a:endParaRPr lang="zh-CN" altLang="en-US"/>
+              </a:p>
+            </p:txBody>
           </p:sp>
         </p:grpSp>
         <p:sp>
@@ -16060,6 +17180,13 @@
               </a:solidFill>
             </a:ln>
           </p:spPr>
+          <p:txBody>
+            <a:bodyPr/>
+            <a:lstStyle/>
+            <a:p>
+              <a:endParaRPr lang="zh-CN" altLang="en-US"/>
+            </a:p>
+          </p:txBody>
         </p:sp>
         <p:sp>
           <p:nvSpPr>
@@ -16084,6 +17211,13 @@
               <a:noFill/>
             </a:ln>
           </p:spPr>
+          <p:txBody>
+            <a:bodyPr/>
+            <a:lstStyle/>
+            <a:p>
+              <a:endParaRPr lang="zh-CN" altLang="en-US"/>
+            </a:p>
+          </p:txBody>
         </p:sp>
         <p:sp>
           <p:nvSpPr>
@@ -16201,6 +17335,13 @@
                 </a:solidFill>
               </a:ln>
             </p:spPr>
+            <p:txBody>
+              <a:bodyPr/>
+              <a:lstStyle/>
+              <a:p>
+                <a:endParaRPr lang="zh-CN" altLang="en-US"/>
+              </a:p>
+            </p:txBody>
           </p:sp>
           <p:sp>
             <p:nvSpPr>
@@ -16259,6 +17400,13 @@
                 </a:solidFill>
               </a:ln>
             </p:spPr>
+            <p:txBody>
+              <a:bodyPr/>
+              <a:lstStyle/>
+              <a:p>
+                <a:endParaRPr lang="zh-CN" altLang="en-US"/>
+              </a:p>
+            </p:txBody>
           </p:sp>
         </p:grpSp>
         <p:sp>
@@ -16378,6 +17526,13 @@
               <a:tailEnd type="triangle" w="lg" len="lg"/>
             </a:ln>
           </p:spPr>
+          <p:txBody>
+            <a:bodyPr/>
+            <a:lstStyle/>
+            <a:p>
+              <a:endParaRPr lang="zh-CN" altLang="en-US"/>
+            </a:p>
+          </p:txBody>
         </p:sp>
         <p:sp>
           <p:nvSpPr>
@@ -16401,6 +17556,13 @@
               <a:tailEnd type="triangle" w="lg" len="lg"/>
             </a:ln>
           </p:spPr>
+          <p:txBody>
+            <a:bodyPr/>
+            <a:lstStyle/>
+            <a:p>
+              <a:endParaRPr lang="zh-CN" altLang="en-US"/>
+            </a:p>
+          </p:txBody>
         </p:sp>
         <p:sp>
           <p:nvSpPr>
@@ -16424,6 +17586,13 @@
               <a:tailEnd type="triangle" w="lg" len="lg"/>
             </a:ln>
           </p:spPr>
+          <p:txBody>
+            <a:bodyPr/>
+            <a:lstStyle/>
+            <a:p>
+              <a:endParaRPr lang="zh-CN" altLang="en-US"/>
+            </a:p>
+          </p:txBody>
         </p:sp>
       </p:grpSp>
       <p:grpSp>
@@ -16465,6 +17634,13 @@
               </a:solidFill>
             </a:ln>
           </p:spPr>
+          <p:txBody>
+            <a:bodyPr/>
+            <a:lstStyle/>
+            <a:p>
+              <a:endParaRPr lang="zh-CN" altLang="en-US"/>
+            </a:p>
+          </p:txBody>
         </p:sp>
         <p:sp>
           <p:nvSpPr>
@@ -16545,6 +17721,13 @@
                 </a:solidFill>
               </a:ln>
             </p:spPr>
+            <p:txBody>
+              <a:bodyPr/>
+              <a:lstStyle/>
+              <a:p>
+                <a:endParaRPr lang="zh-CN" altLang="en-US"/>
+              </a:p>
+            </p:txBody>
           </p:sp>
           <p:sp>
             <p:nvSpPr>
@@ -16569,6 +17752,13 @@
                 <a:noFill/>
               </a:ln>
             </p:spPr>
+            <p:txBody>
+              <a:bodyPr/>
+              <a:lstStyle/>
+              <a:p>
+                <a:endParaRPr lang="zh-CN" altLang="en-US"/>
+              </a:p>
+            </p:txBody>
           </p:sp>
           <p:grpSp>
             <p:nvGrpSpPr>
@@ -16636,6 +17826,13 @@
                   </a:solidFill>
                 </a:ln>
               </p:spPr>
+              <p:txBody>
+                <a:bodyPr/>
+                <a:lstStyle/>
+                <a:p>
+                  <a:endParaRPr lang="zh-CN" altLang="en-US"/>
+                </a:p>
+              </p:txBody>
             </p:sp>
             <p:sp>
               <p:nvSpPr>
@@ -16685,6 +17882,13 @@
                   </a:solidFill>
                 </a:ln>
               </p:spPr>
+              <p:txBody>
+                <a:bodyPr/>
+                <a:lstStyle/>
+                <a:p>
+                  <a:endParaRPr lang="zh-CN" altLang="en-US"/>
+                </a:p>
+              </p:txBody>
             </p:sp>
             <p:sp>
               <p:nvSpPr>
@@ -16734,6 +17938,13 @@
                   </a:solidFill>
                 </a:ln>
               </p:spPr>
+              <p:txBody>
+                <a:bodyPr/>
+                <a:lstStyle/>
+                <a:p>
+                  <a:endParaRPr lang="zh-CN" altLang="en-US"/>
+                </a:p>
+              </p:txBody>
             </p:sp>
           </p:grpSp>
           <p:sp>
@@ -16851,6 +18062,13 @@
                 </a:solidFill>
               </a:ln>
             </p:spPr>
+            <p:txBody>
+              <a:bodyPr/>
+              <a:lstStyle/>
+              <a:p>
+                <a:endParaRPr lang="zh-CN" altLang="en-US"/>
+              </a:p>
+            </p:txBody>
           </p:sp>
           <p:sp>
             <p:nvSpPr>
@@ -17007,6 +18225,13 @@
                 </a:solidFill>
               </a:ln>
             </p:spPr>
+            <p:txBody>
+              <a:bodyPr/>
+              <a:lstStyle/>
+              <a:p>
+                <a:endParaRPr lang="zh-CN" altLang="en-US"/>
+              </a:p>
+            </p:txBody>
           </p:sp>
           <p:sp>
             <p:nvSpPr>
@@ -17163,6 +18388,13 @@
                 </a:solidFill>
               </a:ln>
             </p:spPr>
+            <p:txBody>
+              <a:bodyPr/>
+              <a:lstStyle/>
+              <a:p>
+                <a:endParaRPr lang="zh-CN" altLang="en-US"/>
+              </a:p>
+            </p:txBody>
           </p:sp>
           <p:sp>
             <p:nvSpPr>
@@ -17284,6 +18516,13 @@
                 </a:solidFill>
               </a:ln>
             </p:spPr>
+            <p:txBody>
+              <a:bodyPr/>
+              <a:lstStyle/>
+              <a:p>
+                <a:endParaRPr lang="zh-CN" altLang="en-US"/>
+              </a:p>
+            </p:txBody>
           </p:sp>
           <p:sp>
             <p:nvSpPr>
@@ -17308,6 +18547,13 @@
                 <a:noFill/>
               </a:ln>
             </p:spPr>
+            <p:txBody>
+              <a:bodyPr/>
+              <a:lstStyle/>
+              <a:p>
+                <a:endParaRPr lang="zh-CN" altLang="en-US"/>
+              </a:p>
+            </p:txBody>
           </p:sp>
           <p:grpSp>
             <p:nvGrpSpPr>
@@ -17385,6 +18631,13 @@
                   </a:solidFill>
                 </a:ln>
               </p:spPr>
+              <p:txBody>
+                <a:bodyPr/>
+                <a:lstStyle/>
+                <a:p>
+                  <a:endParaRPr lang="zh-CN" altLang="en-US"/>
+                </a:p>
+              </p:txBody>
             </p:sp>
             <p:sp>
               <p:nvSpPr>
@@ -17443,6 +18696,13 @@
                   </a:solidFill>
                 </a:ln>
               </p:spPr>
+              <p:txBody>
+                <a:bodyPr/>
+                <a:lstStyle/>
+                <a:p>
+                  <a:endParaRPr lang="zh-CN" altLang="en-US"/>
+                </a:p>
+              </p:txBody>
             </p:sp>
           </p:grpSp>
           <p:sp>
@@ -17560,6 +18820,13 @@
                 </a:solidFill>
               </a:ln>
             </p:spPr>
+            <p:txBody>
+              <a:bodyPr/>
+              <a:lstStyle/>
+              <a:p>
+                <a:endParaRPr lang="zh-CN" altLang="en-US"/>
+              </a:p>
+            </p:txBody>
           </p:sp>
           <p:sp>
             <p:nvSpPr>
@@ -17716,6 +18983,13 @@
                 </a:solidFill>
               </a:ln>
             </p:spPr>
+            <p:txBody>
+              <a:bodyPr/>
+              <a:lstStyle/>
+              <a:p>
+                <a:endParaRPr lang="zh-CN" altLang="en-US"/>
+              </a:p>
+            </p:txBody>
           </p:sp>
           <p:sp>
             <p:nvSpPr>
@@ -17872,6 +19146,13 @@
                 </a:solidFill>
               </a:ln>
             </p:spPr>
+            <p:txBody>
+              <a:bodyPr/>
+              <a:lstStyle/>
+              <a:p>
+                <a:endParaRPr lang="zh-CN" altLang="en-US"/>
+              </a:p>
+            </p:txBody>
           </p:sp>
           <p:sp>
             <p:nvSpPr>
@@ -18028,6 +19309,13 @@
                 </a:solidFill>
               </a:ln>
             </p:spPr>
+            <p:txBody>
+              <a:bodyPr/>
+              <a:lstStyle/>
+              <a:p>
+                <a:endParaRPr lang="zh-CN" altLang="en-US"/>
+              </a:p>
+            </p:txBody>
           </p:sp>
           <p:sp>
             <p:nvSpPr>
@@ -18149,6 +19437,13 @@
                 </a:solidFill>
               </a:ln>
             </p:spPr>
+            <p:txBody>
+              <a:bodyPr/>
+              <a:lstStyle/>
+              <a:p>
+                <a:endParaRPr lang="zh-CN" altLang="en-US"/>
+              </a:p>
+            </p:txBody>
           </p:sp>
           <p:sp>
             <p:nvSpPr>
@@ -18173,6 +19468,13 @@
                 <a:noFill/>
               </a:ln>
             </p:spPr>
+            <p:txBody>
+              <a:bodyPr/>
+              <a:lstStyle/>
+              <a:p>
+                <a:endParaRPr lang="zh-CN" altLang="en-US"/>
+              </a:p>
+            </p:txBody>
           </p:sp>
           <p:grpSp>
             <p:nvGrpSpPr>
@@ -18250,6 +19552,13 @@
                   </a:solidFill>
                 </a:ln>
               </p:spPr>
+              <p:txBody>
+                <a:bodyPr/>
+                <a:lstStyle/>
+                <a:p>
+                  <a:endParaRPr lang="zh-CN" altLang="en-US"/>
+                </a:p>
+              </p:txBody>
             </p:sp>
             <p:sp>
               <p:nvSpPr>
@@ -18308,6 +19617,13 @@
                   </a:solidFill>
                 </a:ln>
               </p:spPr>
+              <p:txBody>
+                <a:bodyPr/>
+                <a:lstStyle/>
+                <a:p>
+                  <a:endParaRPr lang="zh-CN" altLang="en-US"/>
+                </a:p>
+              </p:txBody>
             </p:sp>
           </p:grpSp>
           <p:sp>
@@ -18425,6 +19741,13 @@
                 </a:solidFill>
               </a:ln>
             </p:spPr>
+            <p:txBody>
+              <a:bodyPr/>
+              <a:lstStyle/>
+              <a:p>
+                <a:endParaRPr lang="zh-CN" altLang="en-US"/>
+              </a:p>
+            </p:txBody>
           </p:sp>
           <p:sp>
             <p:nvSpPr>
@@ -18581,6 +19904,13 @@
                 </a:solidFill>
               </a:ln>
             </p:spPr>
+            <p:txBody>
+              <a:bodyPr/>
+              <a:lstStyle/>
+              <a:p>
+                <a:endParaRPr lang="zh-CN" altLang="en-US"/>
+              </a:p>
+            </p:txBody>
           </p:sp>
           <p:sp>
             <p:nvSpPr>
@@ -18697,6 +20027,13 @@
                 </a:solidFill>
               </a:ln>
             </p:spPr>
+            <p:txBody>
+              <a:bodyPr/>
+              <a:lstStyle/>
+              <a:p>
+                <a:endParaRPr lang="zh-CN" altLang="en-US"/>
+              </a:p>
+            </p:txBody>
           </p:sp>
           <p:sp>
             <p:nvSpPr>
@@ -18801,6 +20138,13 @@
               <a:tailEnd type="triangle" w="lg" len="lg"/>
             </a:ln>
           </p:spPr>
+          <p:txBody>
+            <a:bodyPr/>
+            <a:lstStyle/>
+            <a:p>
+              <a:endParaRPr lang="zh-CN" altLang="en-US"/>
+            </a:p>
+          </p:txBody>
         </p:sp>
         <p:sp>
           <p:nvSpPr>
@@ -18827,6 +20171,13 @@
               <a:noFill/>
             </a:ln>
           </p:spPr>
+          <p:txBody>
+            <a:bodyPr/>
+            <a:lstStyle/>
+            <a:p>
+              <a:endParaRPr lang="zh-CN" altLang="en-US"/>
+            </a:p>
+          </p:txBody>
         </p:sp>
         <p:sp>
           <p:nvSpPr>
@@ -18890,6 +20241,13 @@
               <a:tailEnd type="triangle" w="lg" len="lg"/>
             </a:ln>
           </p:spPr>
+          <p:txBody>
+            <a:bodyPr/>
+            <a:lstStyle/>
+            <a:p>
+              <a:endParaRPr lang="zh-CN" altLang="en-US"/>
+            </a:p>
+          </p:txBody>
         </p:sp>
         <p:sp>
           <p:nvSpPr>
@@ -18916,6 +20274,13 @@
               <a:noFill/>
             </a:ln>
           </p:spPr>
+          <p:txBody>
+            <a:bodyPr/>
+            <a:lstStyle/>
+            <a:p>
+              <a:endParaRPr lang="zh-CN" altLang="en-US"/>
+            </a:p>
+          </p:txBody>
         </p:sp>
         <p:sp>
           <p:nvSpPr>
@@ -18982,6 +20347,13 @@
               <a:noFill/>
             </a:ln>
           </p:spPr>
+          <p:txBody>
+            <a:bodyPr/>
+            <a:lstStyle/>
+            <a:p>
+              <a:endParaRPr lang="zh-CN" altLang="en-US"/>
+            </a:p>
+          </p:txBody>
         </p:sp>
         <p:grpSp>
           <p:nvGrpSpPr>
@@ -19049,6 +20421,13 @@
                 </a:solidFill>
               </a:ln>
             </p:spPr>
+            <p:txBody>
+              <a:bodyPr/>
+              <a:lstStyle/>
+              <a:p>
+                <a:endParaRPr lang="zh-CN" altLang="en-US"/>
+              </a:p>
+            </p:txBody>
           </p:sp>
           <p:sp>
             <p:nvSpPr>
@@ -19085,6 +20464,13 @@
                 </a:solidFill>
               </a:ln>
             </p:spPr>
+            <p:txBody>
+              <a:bodyPr/>
+              <a:lstStyle/>
+              <a:p>
+                <a:endParaRPr lang="zh-CN" altLang="en-US"/>
+              </a:p>
+            </p:txBody>
           </p:sp>
         </p:grpSp>
         <p:sp>
@@ -19177,6 +20563,13 @@
               </a:solidFill>
             </a:ln>
           </p:spPr>
+          <p:txBody>
+            <a:bodyPr/>
+            <a:lstStyle/>
+            <a:p>
+              <a:endParaRPr lang="zh-CN" altLang="en-US"/>
+            </a:p>
+          </p:txBody>
         </p:sp>
         <p:sp>
           <p:nvSpPr>
@@ -19264,9 +20657,18 @@
   <p:clrMapOvr>
     <a:masterClrMapping/>
   </p:clrMapOvr>
-  <p:transition xmlns:p14="http://schemas.microsoft.com/office/powerpoint/2010/main" p14:dur="400">
-    <p:fade/>
-  </p:transition>
+  <mc:AlternateContent xmlns:mc="http://schemas.openxmlformats.org/markup-compatibility/2006">
+    <mc:Choice xmlns:p14="http://schemas.microsoft.com/office/powerpoint/2010/main" Requires="p14">
+      <p:transition p14:dur="400">
+        <p:fade/>
+      </p:transition>
+    </mc:Choice>
+    <mc:Fallback>
+      <p:transition>
+        <p:fade/>
+      </p:transition>
+    </mc:Fallback>
+  </mc:AlternateContent>
   <p:timing>
     <p:tnLst>
       <p:par>
@@ -19636,6 +21038,13 @@
               <a:noFill/>
             </a:ln>
           </p:spPr>
+          <p:txBody>
+            <a:bodyPr/>
+            <a:lstStyle/>
+            <a:p>
+              <a:endParaRPr lang="zh-CN" altLang="en-US"/>
+            </a:p>
+          </p:txBody>
         </p:sp>
         <p:sp>
           <p:nvSpPr>
@@ -19658,6 +21067,13 @@
               <a:noFill/>
             </a:ln>
           </p:spPr>
+          <p:txBody>
+            <a:bodyPr/>
+            <a:lstStyle/>
+            <a:p>
+              <a:endParaRPr lang="zh-CN" altLang="en-US"/>
+            </a:p>
+          </p:txBody>
         </p:sp>
         <p:sp>
           <p:nvSpPr>
@@ -19682,6 +21098,13 @@
               <a:noFill/>
             </a:ln>
           </p:spPr>
+          <p:txBody>
+            <a:bodyPr/>
+            <a:lstStyle/>
+            <a:p>
+              <a:endParaRPr lang="zh-CN" altLang="en-US"/>
+            </a:p>
+          </p:txBody>
         </p:sp>
         <p:sp>
           <p:nvSpPr>
@@ -19706,6 +21129,13 @@
               <a:noFill/>
             </a:ln>
           </p:spPr>
+          <p:txBody>
+            <a:bodyPr/>
+            <a:lstStyle/>
+            <a:p>
+              <a:endParaRPr lang="zh-CN" altLang="en-US"/>
+            </a:p>
+          </p:txBody>
         </p:sp>
       </p:grpSp>
       <p:grpSp>
@@ -19917,6 +21347,13 @@
               </a:solidFill>
             </a:ln>
           </p:spPr>
+          <p:txBody>
+            <a:bodyPr/>
+            <a:lstStyle/>
+            <a:p>
+              <a:endParaRPr lang="zh-CN" altLang="en-US"/>
+            </a:p>
+          </p:txBody>
         </p:sp>
       </p:grpSp>
       <p:grpSp>
@@ -19958,6 +21395,13 @@
               </a:solidFill>
             </a:ln>
           </p:spPr>
+          <p:txBody>
+            <a:bodyPr/>
+            <a:lstStyle/>
+            <a:p>
+              <a:endParaRPr lang="zh-CN" altLang="en-US"/>
+            </a:p>
+          </p:txBody>
         </p:sp>
         <p:grpSp>
           <p:nvGrpSpPr>
@@ -20025,6 +21469,13 @@
                 </a:solidFill>
               </a:ln>
             </p:spPr>
+            <p:txBody>
+              <a:bodyPr/>
+              <a:lstStyle/>
+              <a:p>
+                <a:endParaRPr lang="zh-CN" altLang="en-US"/>
+              </a:p>
+            </p:txBody>
           </p:sp>
           <p:sp>
             <p:nvSpPr>
@@ -20074,6 +21525,13 @@
                 </a:solidFill>
               </a:ln>
             </p:spPr>
+            <p:txBody>
+              <a:bodyPr/>
+              <a:lstStyle/>
+              <a:p>
+                <a:endParaRPr lang="zh-CN" altLang="en-US"/>
+              </a:p>
+            </p:txBody>
           </p:sp>
           <p:sp>
             <p:nvSpPr>
@@ -20123,6 +21581,13 @@
                 </a:solidFill>
               </a:ln>
             </p:spPr>
+            <p:txBody>
+              <a:bodyPr/>
+              <a:lstStyle/>
+              <a:p>
+                <a:endParaRPr lang="zh-CN" altLang="en-US"/>
+              </a:p>
+            </p:txBody>
           </p:sp>
         </p:grpSp>
         <p:sp>
@@ -20272,6 +21737,13 @@
               </a:solidFill>
             </a:ln>
           </p:spPr>
+          <p:txBody>
+            <a:bodyPr/>
+            <a:lstStyle/>
+            <a:p>
+              <a:endParaRPr lang="zh-CN" altLang="en-US"/>
+            </a:p>
+          </p:txBody>
         </p:sp>
         <p:grpSp>
           <p:nvGrpSpPr>
@@ -20322,6 +21794,13 @@
                 </a:solidFill>
               </a:ln>
             </p:spPr>
+            <p:txBody>
+              <a:bodyPr/>
+              <a:lstStyle/>
+              <a:p>
+                <a:endParaRPr lang="zh-CN" altLang="en-US"/>
+              </a:p>
+            </p:txBody>
           </p:sp>
           <p:sp>
             <p:nvSpPr>
@@ -20371,6 +21850,13 @@
                 </a:solidFill>
               </a:ln>
             </p:spPr>
+            <p:txBody>
+              <a:bodyPr/>
+              <a:lstStyle/>
+              <a:p>
+                <a:endParaRPr lang="zh-CN" altLang="en-US"/>
+              </a:p>
+            </p:txBody>
           </p:sp>
           <p:sp>
             <p:nvSpPr>
@@ -20425,6 +21911,13 @@
                 </a:solidFill>
               </a:ln>
             </p:spPr>
+            <p:txBody>
+              <a:bodyPr/>
+              <a:lstStyle/>
+              <a:p>
+                <a:endParaRPr lang="zh-CN" altLang="en-US"/>
+              </a:p>
+            </p:txBody>
           </p:sp>
         </p:grpSp>
         <p:sp>
@@ -20542,6 +22035,13 @@
               </a:solidFill>
             </a:ln>
           </p:spPr>
+          <p:txBody>
+            <a:bodyPr/>
+            <a:lstStyle/>
+            <a:p>
+              <a:endParaRPr lang="zh-CN" altLang="en-US"/>
+            </a:p>
+          </p:txBody>
         </p:sp>
         <p:sp>
           <p:nvSpPr>
@@ -20648,6 +22148,13 @@
               </a:solidFill>
             </a:ln>
           </p:spPr>
+          <p:txBody>
+            <a:bodyPr/>
+            <a:lstStyle/>
+            <a:p>
+              <a:endParaRPr lang="zh-CN" altLang="en-US"/>
+            </a:p>
+          </p:txBody>
         </p:sp>
         <p:grpSp>
           <p:nvGrpSpPr>
@@ -20706,6 +22213,13 @@
                 </a:solidFill>
               </a:ln>
             </p:spPr>
+            <p:txBody>
+              <a:bodyPr/>
+              <a:lstStyle/>
+              <a:p>
+                <a:endParaRPr lang="zh-CN" altLang="en-US"/>
+              </a:p>
+            </p:txBody>
           </p:sp>
           <p:sp>
             <p:nvSpPr>
@@ -20769,6 +22283,13 @@
                 </a:solidFill>
               </a:ln>
             </p:spPr>
+            <p:txBody>
+              <a:bodyPr/>
+              <a:lstStyle/>
+              <a:p>
+                <a:endParaRPr lang="zh-CN" altLang="en-US"/>
+              </a:p>
+            </p:txBody>
           </p:sp>
           <p:sp>
             <p:nvSpPr>
@@ -20829,6 +22350,13 @@
                 </a:solidFill>
               </a:ln>
             </p:spPr>
+            <p:txBody>
+              <a:bodyPr/>
+              <a:lstStyle/>
+              <a:p>
+                <a:endParaRPr lang="zh-CN" altLang="en-US"/>
+              </a:p>
+            </p:txBody>
           </p:sp>
         </p:grpSp>
         <p:sp>
@@ -20973,6 +22501,13 @@
               <a:tailEnd type="triangle" w="lg" len="lg"/>
             </a:ln>
           </p:spPr>
+          <p:txBody>
+            <a:bodyPr/>
+            <a:lstStyle/>
+            <a:p>
+              <a:endParaRPr lang="zh-CN" altLang="en-US"/>
+            </a:p>
+          </p:txBody>
         </p:sp>
         <p:sp>
           <p:nvSpPr>
@@ -20981,8 +22516,8 @@
             <p:nvPr/>
           </p:nvSpPr>
           <p:spPr>
-            <a:xfrm>
-              <a:off x="7524750" y="2857500"/>
+            <a:xfrm flipH="1">
+              <a:off x="7547052" y="2857500"/>
               <a:ext cx="1181100" cy="1"/>
             </a:xfrm>
             <a:prstGeom prst="line">
@@ -20996,6 +22531,13 @@
               <a:tailEnd type="triangle" w="lg" len="lg"/>
             </a:ln>
           </p:spPr>
+          <p:txBody>
+            <a:bodyPr/>
+            <a:lstStyle/>
+            <a:p>
+              <a:endParaRPr lang="zh-CN" altLang="en-US"/>
+            </a:p>
+          </p:txBody>
         </p:sp>
         <p:sp>
           <p:nvSpPr>
@@ -21022,6 +22564,13 @@
               <a:noFill/>
             </a:ln>
           </p:spPr>
+          <p:txBody>
+            <a:bodyPr/>
+            <a:lstStyle/>
+            <a:p>
+              <a:endParaRPr lang="zh-CN" altLang="en-US"/>
+            </a:p>
+          </p:txBody>
         </p:sp>
         <p:sp>
           <p:nvSpPr>
@@ -21088,6 +22637,13 @@
               <a:noFill/>
             </a:ln>
           </p:spPr>
+          <p:txBody>
+            <a:bodyPr/>
+            <a:lstStyle/>
+            <a:p>
+              <a:endParaRPr lang="zh-CN" altLang="en-US"/>
+            </a:p>
+          </p:txBody>
         </p:sp>
         <p:sp>
           <p:nvSpPr>
@@ -21179,6 +22735,13 @@
               </a:solidFill>
             </a:ln>
           </p:spPr>
+          <p:txBody>
+            <a:bodyPr/>
+            <a:lstStyle/>
+            <a:p>
+              <a:endParaRPr lang="zh-CN" altLang="en-US"/>
+            </a:p>
+          </p:txBody>
         </p:sp>
         <p:grpSp>
           <p:nvGrpSpPr>
@@ -21229,6 +22792,13 @@
                 </a:solidFill>
               </a:ln>
             </p:spPr>
+            <p:txBody>
+              <a:bodyPr/>
+              <a:lstStyle/>
+              <a:p>
+                <a:endParaRPr lang="zh-CN" altLang="en-US"/>
+              </a:p>
+            </p:txBody>
           </p:sp>
           <p:sp>
             <p:nvSpPr>
@@ -21278,6 +22848,13 @@
                 </a:solidFill>
               </a:ln>
             </p:spPr>
+            <p:txBody>
+              <a:bodyPr/>
+              <a:lstStyle/>
+              <a:p>
+                <a:endParaRPr lang="zh-CN" altLang="en-US"/>
+              </a:p>
+            </p:txBody>
           </p:sp>
           <p:sp>
             <p:nvSpPr>
@@ -21332,6 +22909,13 @@
                 </a:solidFill>
               </a:ln>
             </p:spPr>
+            <p:txBody>
+              <a:bodyPr/>
+              <a:lstStyle/>
+              <a:p>
+                <a:endParaRPr lang="zh-CN" altLang="en-US"/>
+              </a:p>
+            </p:txBody>
           </p:sp>
         </p:grpSp>
         <p:sp>
@@ -21411,18 +22995,7 @@
                   <a:ea typeface="Microsoft YaHei"/>
                   <a:cs typeface="Arial"/>
                 </a:rPr>
-                <a:t>复合 PK 防止同一文件</a:t>
-              </a:r>
-              <a:r>
-                <a:rPr lang="zh-CN" sz="1050" dirty="0">
-                  <a:solidFill>
-                    <a:srgbClr val="AAB7CC"/>
-                  </a:solidFill>
-                  <a:latin typeface="Arial"/>
-                  <a:ea typeface="Microsoft YaHei"/>
-                  <a:cs typeface="Arial"/>
-                </a:rPr>
-                <a:t>重复加入同一知识库</a:t>
+                <a:t>复合 PK 防止同一文件重复加入同一知识库</a:t>
               </a:r>
             </a:p>
           </p:txBody>
@@ -21462,6 +23035,13 @@
               </a:solidFill>
             </a:ln>
           </p:spPr>
+          <p:txBody>
+            <a:bodyPr/>
+            <a:lstStyle/>
+            <a:p>
+              <a:endParaRPr lang="zh-CN" altLang="en-US"/>
+            </a:p>
+          </p:txBody>
         </p:sp>
         <p:grpSp>
           <p:nvGrpSpPr>
@@ -21512,6 +23092,13 @@
                 </a:solidFill>
               </a:ln>
             </p:spPr>
+            <p:txBody>
+              <a:bodyPr/>
+              <a:lstStyle/>
+              <a:p>
+                <a:endParaRPr lang="zh-CN" altLang="en-US"/>
+              </a:p>
+            </p:txBody>
           </p:sp>
           <p:sp>
             <p:nvSpPr>
@@ -21548,6 +23135,13 @@
                 </a:solidFill>
               </a:ln>
             </p:spPr>
+            <p:txBody>
+              <a:bodyPr/>
+              <a:lstStyle/>
+              <a:p>
+                <a:endParaRPr lang="zh-CN" altLang="en-US"/>
+              </a:p>
+            </p:txBody>
           </p:sp>
           <p:sp>
             <p:nvSpPr>
@@ -21584,6 +23178,13 @@
                 </a:solidFill>
               </a:ln>
             </p:spPr>
+            <p:txBody>
+              <a:bodyPr/>
+              <a:lstStyle/>
+              <a:p>
+                <a:endParaRPr lang="zh-CN" altLang="en-US"/>
+              </a:p>
+            </p:txBody>
           </p:sp>
           <p:sp>
             <p:nvSpPr>
@@ -21620,6 +23221,13 @@
                 </a:solidFill>
               </a:ln>
             </p:spPr>
+            <p:txBody>
+              <a:bodyPr/>
+              <a:lstStyle/>
+              <a:p>
+                <a:endParaRPr lang="zh-CN" altLang="en-US"/>
+              </a:p>
+            </p:txBody>
           </p:sp>
         </p:grpSp>
         <p:sp>
@@ -21699,18 +23307,7 @@
                   <a:ea typeface="Microsoft YaHei"/>
                   <a:cs typeface="Arial"/>
                 </a:rPr>
-                <a:t>(user_id, file_hash)</a:t>
-              </a:r>
-              <a:r>
-                <a:rPr lang="zh-CN" sz="1050" dirty="0">
-                  <a:solidFill>
-                    <a:srgbClr val="AAB7CC"/>
-                  </a:solidFill>
-                  <a:latin typeface="Arial"/>
-                  <a:ea typeface="Microsoft YaHei"/>
-                  <a:cs typeface="Arial"/>
-                </a:rPr>
-                <a:t>活跃文件范围内唯一</a:t>
+                <a:t>(user_id, file_hash)活跃文件范围内唯一</a:t>
               </a:r>
             </a:p>
           </p:txBody>
@@ -21750,6 +23347,13 @@
               </a:solidFill>
             </a:ln>
           </p:spPr>
+          <p:txBody>
+            <a:bodyPr/>
+            <a:lstStyle/>
+            <a:p>
+              <a:endParaRPr lang="zh-CN" altLang="en-US"/>
+            </a:p>
+          </p:txBody>
         </p:sp>
         <p:grpSp>
           <p:nvGrpSpPr>
@@ -21829,6 +23433,13 @@
                 </a:solidFill>
               </a:ln>
             </p:spPr>
+            <p:txBody>
+              <a:bodyPr/>
+              <a:lstStyle/>
+              <a:p>
+                <a:endParaRPr lang="zh-CN" altLang="en-US"/>
+              </a:p>
+            </p:txBody>
           </p:sp>
           <p:sp>
             <p:nvSpPr>
@@ -21882,6 +23493,13 @@
                 </a:solidFill>
               </a:ln>
             </p:spPr>
+            <p:txBody>
+              <a:bodyPr/>
+              <a:lstStyle/>
+              <a:p>
+                <a:endParaRPr lang="zh-CN" altLang="en-US"/>
+              </a:p>
+            </p:txBody>
           </p:sp>
           <p:sp>
             <p:nvSpPr>
@@ -21931,6 +23549,13 @@
                 </a:solidFill>
               </a:ln>
             </p:spPr>
+            <p:txBody>
+              <a:bodyPr/>
+              <a:lstStyle/>
+              <a:p>
+                <a:endParaRPr lang="zh-CN" altLang="en-US"/>
+              </a:p>
+            </p:txBody>
           </p:sp>
         </p:grpSp>
         <p:sp>
@@ -22010,18 +23635,7 @@
                   <a:ea typeface="Microsoft YaHei"/>
                   <a:cs typeface="Arial"/>
                 </a:rPr>
-                <a:t>解绑需删除桥接记录</a:t>
-              </a:r>
-              <a:r>
-                <a:rPr lang="zh-CN" sz="1050" dirty="0">
-                  <a:solidFill>
-                    <a:srgbClr val="AAB7CC"/>
-                  </a:solidFill>
-                  <a:latin typeface="Arial"/>
-                  <a:ea typeface="Microsoft YaHei"/>
-                  <a:cs typeface="Arial"/>
-                </a:rPr>
-                <a:t>应用层校验两侧 user_id</a:t>
+                <a:t>解绑需删除桥接记录应用层校验两侧 user_id</a:t>
               </a:r>
             </a:p>
           </p:txBody>
@@ -22076,6 +23690,13 @@
               </a:solidFill>
             </a:ln>
           </p:spPr>
+          <p:txBody>
+            <a:bodyPr/>
+            <a:lstStyle/>
+            <a:p>
+              <a:endParaRPr lang="zh-CN" altLang="en-US"/>
+            </a:p>
+          </p:txBody>
         </p:sp>
         <p:sp>
           <p:nvSpPr>
@@ -22163,9 +23784,18 @@
   <p:clrMapOvr>
     <a:masterClrMapping/>
   </p:clrMapOvr>
-  <p:transition xmlns:p14="http://schemas.microsoft.com/office/powerpoint/2010/main" p14:dur="400">
-    <p:fade/>
-  </p:transition>
+  <mc:AlternateContent xmlns:mc="http://schemas.openxmlformats.org/markup-compatibility/2006">
+    <mc:Choice xmlns:p14="http://schemas.microsoft.com/office/powerpoint/2010/main" Requires="p14">
+      <p:transition p14:dur="400">
+        <p:fade/>
+      </p:transition>
+    </mc:Choice>
+    <mc:Fallback>
+      <p:transition>
+        <p:fade/>
+      </p:transition>
+    </mc:Fallback>
+  </mc:AlternateContent>
   <p:timing>
     <p:tnLst>
       <p:par>
@@ -22355,6 +23985,13 @@
               <a:noFill/>
             </a:ln>
           </p:spPr>
+          <p:txBody>
+            <a:bodyPr/>
+            <a:lstStyle/>
+            <a:p>
+              <a:endParaRPr lang="zh-CN" altLang="en-US"/>
+            </a:p>
+          </p:txBody>
         </p:sp>
         <p:sp>
           <p:nvSpPr>
@@ -22377,6 +24014,13 @@
               <a:noFill/>
             </a:ln>
           </p:spPr>
+          <p:txBody>
+            <a:bodyPr/>
+            <a:lstStyle/>
+            <a:p>
+              <a:endParaRPr lang="zh-CN" altLang="en-US"/>
+            </a:p>
+          </p:txBody>
         </p:sp>
         <p:sp>
           <p:nvSpPr>
@@ -22401,6 +24045,13 @@
               <a:noFill/>
             </a:ln>
           </p:spPr>
+          <p:txBody>
+            <a:bodyPr/>
+            <a:lstStyle/>
+            <a:p>
+              <a:endParaRPr lang="zh-CN" altLang="en-US"/>
+            </a:p>
+          </p:txBody>
         </p:sp>
         <p:sp>
           <p:nvSpPr>
@@ -22425,6 +24076,13 @@
               <a:noFill/>
             </a:ln>
           </p:spPr>
+          <p:txBody>
+            <a:bodyPr/>
+            <a:lstStyle/>
+            <a:p>
+              <a:endParaRPr lang="zh-CN" altLang="en-US"/>
+            </a:p>
+          </p:txBody>
         </p:sp>
       </p:grpSp>
       <p:grpSp>
@@ -22636,6 +24294,13 @@
               </a:solidFill>
             </a:ln>
           </p:spPr>
+          <p:txBody>
+            <a:bodyPr/>
+            <a:lstStyle/>
+            <a:p>
+              <a:endParaRPr lang="zh-CN" altLang="en-US"/>
+            </a:p>
+          </p:txBody>
         </p:sp>
       </p:grpSp>
       <p:grpSp>
@@ -22677,6 +24342,13 @@
               </a:solidFill>
             </a:ln>
           </p:spPr>
+          <p:txBody>
+            <a:bodyPr/>
+            <a:lstStyle/>
+            <a:p>
+              <a:endParaRPr lang="zh-CN" altLang="en-US"/>
+            </a:p>
+          </p:txBody>
         </p:sp>
         <p:sp>
           <p:nvSpPr>
@@ -22743,6 +24415,13 @@
               </a:solidFill>
             </a:ln>
           </p:spPr>
+          <p:txBody>
+            <a:bodyPr/>
+            <a:lstStyle/>
+            <a:p>
+              <a:endParaRPr lang="zh-CN" altLang="en-US"/>
+            </a:p>
+          </p:txBody>
         </p:sp>
         <p:grpSp>
           <p:nvGrpSpPr>
@@ -22810,6 +24489,13 @@
                 </a:solidFill>
               </a:ln>
             </p:spPr>
+            <p:txBody>
+              <a:bodyPr/>
+              <a:lstStyle/>
+              <a:p>
+                <a:endParaRPr lang="zh-CN" altLang="en-US"/>
+              </a:p>
+            </p:txBody>
           </p:sp>
           <p:sp>
             <p:nvSpPr>
@@ -22862,6 +24548,13 @@
                 </a:solidFill>
               </a:ln>
             </p:spPr>
+            <p:txBody>
+              <a:bodyPr/>
+              <a:lstStyle/>
+              <a:p>
+                <a:endParaRPr lang="zh-CN" altLang="en-US"/>
+              </a:p>
+            </p:txBody>
           </p:sp>
         </p:grpSp>
         <p:sp>
@@ -22969,6 +24662,13 @@
               </a:solidFill>
             </a:ln>
           </p:spPr>
+          <p:txBody>
+            <a:bodyPr/>
+            <a:lstStyle/>
+            <a:p>
+              <a:endParaRPr lang="zh-CN" altLang="en-US"/>
+            </a:p>
+          </p:txBody>
         </p:sp>
         <p:grpSp>
           <p:nvGrpSpPr>
@@ -23036,6 +24736,13 @@
                 </a:solidFill>
               </a:ln>
             </p:spPr>
+            <p:txBody>
+              <a:bodyPr/>
+              <a:lstStyle/>
+              <a:p>
+                <a:endParaRPr lang="zh-CN" altLang="en-US"/>
+              </a:p>
+            </p:txBody>
           </p:sp>
           <p:sp>
             <p:nvSpPr>
@@ -23085,6 +24792,13 @@
                 </a:solidFill>
               </a:ln>
             </p:spPr>
+            <p:txBody>
+              <a:bodyPr/>
+              <a:lstStyle/>
+              <a:p>
+                <a:endParaRPr lang="zh-CN" altLang="en-US"/>
+              </a:p>
+            </p:txBody>
           </p:sp>
           <p:sp>
             <p:nvSpPr>
@@ -23134,6 +24848,13 @@
                 </a:solidFill>
               </a:ln>
             </p:spPr>
+            <p:txBody>
+              <a:bodyPr/>
+              <a:lstStyle/>
+              <a:p>
+                <a:endParaRPr lang="zh-CN" altLang="en-US"/>
+              </a:p>
+            </p:txBody>
           </p:sp>
         </p:grpSp>
         <p:sp>
@@ -23241,6 +24962,13 @@
               </a:solidFill>
             </a:ln>
           </p:spPr>
+          <p:txBody>
+            <a:bodyPr/>
+            <a:lstStyle/>
+            <a:p>
+              <a:endParaRPr lang="zh-CN" altLang="en-US"/>
+            </a:p>
+          </p:txBody>
         </p:sp>
         <p:grpSp>
           <p:nvGrpSpPr>
@@ -23318,6 +25046,13 @@
                 </a:solidFill>
               </a:ln>
             </p:spPr>
+            <p:txBody>
+              <a:bodyPr/>
+              <a:lstStyle/>
+              <a:p>
+                <a:endParaRPr lang="zh-CN" altLang="en-US"/>
+              </a:p>
+            </p:txBody>
           </p:sp>
           <p:sp>
             <p:nvSpPr>
@@ -23376,6 +25111,13 @@
                 </a:solidFill>
               </a:ln>
             </p:spPr>
+            <p:txBody>
+              <a:bodyPr/>
+              <a:lstStyle/>
+              <a:p>
+                <a:endParaRPr lang="zh-CN" altLang="en-US"/>
+              </a:p>
+            </p:txBody>
           </p:sp>
         </p:grpSp>
         <p:sp>
@@ -23496,6 +25238,13 @@
               <a:tailEnd type="triangle" w="lg" len="lg"/>
             </a:ln>
           </p:spPr>
+          <p:txBody>
+            <a:bodyPr/>
+            <a:lstStyle/>
+            <a:p>
+              <a:endParaRPr lang="zh-CN" altLang="en-US"/>
+            </a:p>
+          </p:txBody>
         </p:sp>
         <p:sp>
           <p:nvSpPr>
@@ -23535,6 +25284,13 @@
               <a:tailEnd type="triangle" w="lg" len="lg"/>
             </a:ln>
           </p:spPr>
+          <p:txBody>
+            <a:bodyPr/>
+            <a:lstStyle/>
+            <a:p>
+              <a:endParaRPr lang="zh-CN" altLang="en-US"/>
+            </a:p>
+          </p:txBody>
         </p:sp>
         <p:sp>
           <p:nvSpPr>
@@ -23558,6 +25314,13 @@
               <a:tailEnd type="triangle" w="lg" len="lg"/>
             </a:ln>
           </p:spPr>
+          <p:txBody>
+            <a:bodyPr/>
+            <a:lstStyle/>
+            <a:p>
+              <a:endParaRPr lang="zh-CN" altLang="en-US"/>
+            </a:p>
+          </p:txBody>
         </p:sp>
         <p:sp>
           <p:nvSpPr>
@@ -23584,6 +25347,13 @@
               <a:noFill/>
             </a:ln>
           </p:spPr>
+          <p:txBody>
+            <a:bodyPr/>
+            <a:lstStyle/>
+            <a:p>
+              <a:endParaRPr lang="zh-CN" altLang="en-US"/>
+            </a:p>
+          </p:txBody>
         </p:sp>
         <p:sp>
           <p:nvSpPr>
@@ -23650,6 +25420,13 @@
               <a:noFill/>
             </a:ln>
           </p:spPr>
+          <p:txBody>
+            <a:bodyPr/>
+            <a:lstStyle/>
+            <a:p>
+              <a:endParaRPr lang="zh-CN" altLang="en-US"/>
+            </a:p>
+          </p:txBody>
         </p:sp>
         <p:grpSp>
           <p:nvGrpSpPr>
@@ -23717,6 +25494,13 @@
                 </a:solidFill>
               </a:ln>
             </p:spPr>
+            <p:txBody>
+              <a:bodyPr/>
+              <a:lstStyle/>
+              <a:p>
+                <a:endParaRPr lang="zh-CN" altLang="en-US"/>
+              </a:p>
+            </p:txBody>
           </p:sp>
           <p:sp>
             <p:nvSpPr>
@@ -23756,6 +25540,13 @@
                 </a:solidFill>
               </a:ln>
             </p:spPr>
+            <p:txBody>
+              <a:bodyPr/>
+              <a:lstStyle/>
+              <a:p>
+                <a:endParaRPr lang="zh-CN" altLang="en-US"/>
+              </a:p>
+            </p:txBody>
           </p:sp>
         </p:grpSp>
         <p:sp>
@@ -23795,18 +25586,7 @@
                   <a:ea typeface="Microsoft YaHei"/>
                   <a:cs typeface="Arial"/>
                 </a:rPr>
-                <a:t>必须满足：两表 user_id 相同</a:t>
-              </a:r>
-              <a:r>
-                <a:rPr lang="zh-CN" sz="900" b="1" dirty="0">
-                  <a:solidFill>
-                    <a:srgbClr val="F08080"/>
-                  </a:solidFill>
-                  <a:latin typeface="Arial"/>
-                  <a:ea typeface="Microsoft YaHei"/>
-                  <a:cs typeface="Arial"/>
-                </a:rPr>
-                <a:t>且知识库未被软删除</a:t>
+                <a:t>必须满足：两表 user_id 相同且知识库未被软删除</a:t>
               </a:r>
             </a:p>
           </p:txBody>
@@ -23851,6 +25631,13 @@
               </a:solidFill>
             </a:ln>
           </p:spPr>
+          <p:txBody>
+            <a:bodyPr/>
+            <a:lstStyle/>
+            <a:p>
+              <a:endParaRPr lang="zh-CN" altLang="en-US"/>
+            </a:p>
+          </p:txBody>
         </p:sp>
         <p:sp>
           <p:nvSpPr>
@@ -23958,6 +25745,13 @@
                 </a:solidFill>
               </a:ln>
             </p:spPr>
+            <p:txBody>
+              <a:bodyPr/>
+              <a:lstStyle/>
+              <a:p>
+                <a:endParaRPr lang="zh-CN" altLang="en-US"/>
+              </a:p>
+            </p:txBody>
           </p:sp>
           <p:sp>
             <p:nvSpPr>
@@ -23994,6 +25788,13 @@
                 </a:solidFill>
               </a:ln>
             </p:spPr>
+            <p:txBody>
+              <a:bodyPr/>
+              <a:lstStyle/>
+              <a:p>
+                <a:endParaRPr lang="zh-CN" altLang="en-US"/>
+              </a:p>
+            </p:txBody>
           </p:sp>
         </p:grpSp>
         <p:sp>
@@ -24111,6 +25912,13 @@
               </a:solidFill>
             </a:ln>
           </p:spPr>
+          <p:txBody>
+            <a:bodyPr/>
+            <a:lstStyle/>
+            <a:p>
+              <a:endParaRPr lang="zh-CN" altLang="en-US"/>
+            </a:p>
+          </p:txBody>
         </p:sp>
         <p:grpSp>
           <p:nvGrpSpPr>
@@ -24178,6 +25986,13 @@
                 </a:solidFill>
               </a:ln>
             </p:spPr>
+            <p:txBody>
+              <a:bodyPr/>
+              <a:lstStyle/>
+              <a:p>
+                <a:endParaRPr lang="zh-CN" altLang="en-US"/>
+              </a:p>
+            </p:txBody>
           </p:sp>
           <p:sp>
             <p:nvSpPr>
@@ -24214,6 +26029,13 @@
                 </a:solidFill>
               </a:ln>
             </p:spPr>
+            <p:txBody>
+              <a:bodyPr/>
+              <a:lstStyle/>
+              <a:p>
+                <a:endParaRPr lang="zh-CN" altLang="en-US"/>
+              </a:p>
+            </p:txBody>
           </p:sp>
         </p:grpSp>
         <p:sp>
@@ -24293,18 +26115,7 @@
                   <a:ea typeface="Microsoft YaHei"/>
                   <a:cs typeface="Consolas"/>
                 </a:rPr>
-                <a:t xml:space="preserve">idx_conversations_user_knowledge_base </a:t>
-              </a:r>
-              <a:r>
-                <a:rPr lang="zh-CN" sz="1050" dirty="0">
-                  <a:solidFill>
-                    <a:srgbClr val="AAB7CC"/>
-                  </a:solidFill>
-                  <a:latin typeface="Consolas"/>
-                  <a:ea typeface="Microsoft YaHei"/>
-                  <a:cs typeface="Consolas"/>
-                </a:rPr>
-                <a:t>WHERE deleted_at IS NULL</a:t>
+                <a:t>idx_conversations_user_knowledge_base WHERE deleted_at IS NULL</a:t>
               </a:r>
             </a:p>
           </p:txBody>
@@ -24344,6 +26155,13 @@
               </a:solidFill>
             </a:ln>
           </p:spPr>
+          <p:txBody>
+            <a:bodyPr/>
+            <a:lstStyle/>
+            <a:p>
+              <a:endParaRPr lang="zh-CN" altLang="en-US"/>
+            </a:p>
+          </p:txBody>
         </p:sp>
         <p:grpSp>
           <p:nvGrpSpPr>
@@ -24423,6 +26241,13 @@
                 </a:solidFill>
               </a:ln>
             </p:spPr>
+            <p:txBody>
+              <a:bodyPr/>
+              <a:lstStyle/>
+              <a:p>
+                <a:endParaRPr lang="zh-CN" altLang="en-US"/>
+              </a:p>
+            </p:txBody>
           </p:sp>
           <p:sp>
             <p:nvSpPr>
@@ -24476,6 +26301,13 @@
                 </a:solidFill>
               </a:ln>
             </p:spPr>
+            <p:txBody>
+              <a:bodyPr/>
+              <a:lstStyle/>
+              <a:p>
+                <a:endParaRPr lang="zh-CN" altLang="en-US"/>
+              </a:p>
+            </p:txBody>
           </p:sp>
           <p:sp>
             <p:nvSpPr>
@@ -24525,6 +26357,13 @@
                 </a:solidFill>
               </a:ln>
             </p:spPr>
+            <p:txBody>
+              <a:bodyPr/>
+              <a:lstStyle/>
+              <a:p>
+                <a:endParaRPr lang="zh-CN" altLang="en-US"/>
+              </a:p>
+            </p:txBody>
           </p:sp>
         </p:grpSp>
         <p:sp>
@@ -24604,18 +26443,7 @@
                   <a:ea typeface="Microsoft YaHei"/>
                   <a:cs typeface="Arial"/>
                 </a:rPr>
-                <a:t>DDL 没有 FK 或跨表 CHECK；</a:t>
-              </a:r>
-              <a:r>
-                <a:rPr lang="zh-CN" sz="1050" dirty="0">
-                  <a:solidFill>
-                    <a:srgbClr val="AAB7CC"/>
-                  </a:solidFill>
-                  <a:latin typeface="Arial"/>
-                  <a:ea typeface="Microsoft YaHei"/>
-                  <a:cs typeface="Arial"/>
-                </a:rPr>
-                <a:t>同一用户校验必须由应用层完成。</a:t>
+                <a:t>DDL 没有 FK 或跨表 CHECK；同一用户校验必须由应用层完成。</a:t>
               </a:r>
             </a:p>
           </p:txBody>
@@ -24645,6 +26473,13 @@
               <a:noFill/>
             </a:ln>
           </p:spPr>
+          <p:txBody>
+            <a:bodyPr/>
+            <a:lstStyle/>
+            <a:p>
+              <a:endParaRPr lang="zh-CN" altLang="en-US"/>
+            </a:p>
+          </p:txBody>
         </p:sp>
         <p:sp>
           <p:nvSpPr>
@@ -24736,6 +26571,13 @@
               </a:solidFill>
             </a:ln>
           </p:spPr>
+          <p:txBody>
+            <a:bodyPr/>
+            <a:lstStyle/>
+            <a:p>
+              <a:endParaRPr lang="zh-CN" altLang="en-US"/>
+            </a:p>
+          </p:txBody>
         </p:sp>
         <p:sp>
           <p:nvSpPr>
@@ -24823,9 +26665,18 @@
   <p:clrMapOvr>
     <a:masterClrMapping/>
   </p:clrMapOvr>
-  <p:transition xmlns:p14="http://schemas.microsoft.com/office/powerpoint/2010/main" p14:dur="400">
-    <p:fade/>
-  </p:transition>
+  <mc:AlternateContent xmlns:mc="http://schemas.openxmlformats.org/markup-compatibility/2006">
+    <mc:Choice xmlns:p14="http://schemas.microsoft.com/office/powerpoint/2010/main" Requires="p14">
+      <p:transition p14:dur="400">
+        <p:fade/>
+      </p:transition>
+    </mc:Choice>
+    <mc:Fallback>
+      <p:transition>
+        <p:fade/>
+      </p:transition>
+    </mc:Fallback>
+  </mc:AlternateContent>
   <p:timing>
     <p:tnLst>
       <p:par>
@@ -25015,6 +26866,13 @@
               <a:noFill/>
             </a:ln>
           </p:spPr>
+          <p:txBody>
+            <a:bodyPr/>
+            <a:lstStyle/>
+            <a:p>
+              <a:endParaRPr lang="zh-CN" altLang="en-US"/>
+            </a:p>
+          </p:txBody>
         </p:sp>
         <p:sp>
           <p:nvSpPr>
@@ -25037,6 +26895,13 @@
               <a:noFill/>
             </a:ln>
           </p:spPr>
+          <p:txBody>
+            <a:bodyPr/>
+            <a:lstStyle/>
+            <a:p>
+              <a:endParaRPr lang="zh-CN" altLang="en-US"/>
+            </a:p>
+          </p:txBody>
         </p:sp>
         <p:sp>
           <p:nvSpPr>
@@ -25061,6 +26926,13 @@
               <a:noFill/>
             </a:ln>
           </p:spPr>
+          <p:txBody>
+            <a:bodyPr/>
+            <a:lstStyle/>
+            <a:p>
+              <a:endParaRPr lang="zh-CN" altLang="en-US"/>
+            </a:p>
+          </p:txBody>
         </p:sp>
         <p:sp>
           <p:nvSpPr>
@@ -25085,6 +26957,13 @@
               <a:noFill/>
             </a:ln>
           </p:spPr>
+          <p:txBody>
+            <a:bodyPr/>
+            <a:lstStyle/>
+            <a:p>
+              <a:endParaRPr lang="zh-CN" altLang="en-US"/>
+            </a:p>
+          </p:txBody>
         </p:sp>
       </p:grpSp>
       <p:grpSp>
@@ -25296,6 +27175,13 @@
               </a:solidFill>
             </a:ln>
           </p:spPr>
+          <p:txBody>
+            <a:bodyPr/>
+            <a:lstStyle/>
+            <a:p>
+              <a:endParaRPr lang="zh-CN" altLang="en-US"/>
+            </a:p>
+          </p:txBody>
         </p:sp>
       </p:grpSp>
       <p:grpSp>
@@ -25337,6 +27223,13 @@
               </a:solidFill>
             </a:ln>
           </p:spPr>
+          <p:txBody>
+            <a:bodyPr/>
+            <a:lstStyle/>
+            <a:p>
+              <a:endParaRPr lang="zh-CN" altLang="en-US"/>
+            </a:p>
+          </p:txBody>
         </p:sp>
         <p:grpSp>
           <p:nvGrpSpPr>
@@ -25404,6 +27297,13 @@
                 </a:solidFill>
               </a:ln>
             </p:spPr>
+            <p:txBody>
+              <a:bodyPr/>
+              <a:lstStyle/>
+              <a:p>
+                <a:endParaRPr lang="zh-CN" altLang="en-US"/>
+              </a:p>
+            </p:txBody>
           </p:sp>
           <p:sp>
             <p:nvSpPr>
@@ -25456,6 +27356,13 @@
                 </a:solidFill>
               </a:ln>
             </p:spPr>
+            <p:txBody>
+              <a:bodyPr/>
+              <a:lstStyle/>
+              <a:p>
+                <a:endParaRPr lang="zh-CN" altLang="en-US"/>
+              </a:p>
+            </p:txBody>
           </p:sp>
         </p:grpSp>
         <p:sp>
@@ -25534,6 +27441,13 @@
               <a:prstDash val="lgDash"/>
             </a:ln>
           </p:spPr>
+          <p:txBody>
+            <a:bodyPr/>
+            <a:lstStyle/>
+            <a:p>
+              <a:endParaRPr lang="zh-CN" altLang="en-US"/>
+            </a:p>
+          </p:txBody>
         </p:sp>
         <p:sp>
           <p:nvSpPr>
@@ -25560,6 +27474,13 @@
               </a:solidFill>
             </a:ln>
           </p:spPr>
+          <p:txBody>
+            <a:bodyPr/>
+            <a:lstStyle/>
+            <a:p>
+              <a:endParaRPr lang="zh-CN" altLang="en-US"/>
+            </a:p>
+          </p:txBody>
         </p:sp>
         <p:grpSp>
           <p:nvGrpSpPr>
@@ -25639,6 +27560,13 @@
                 </a:solidFill>
               </a:ln>
             </p:spPr>
+            <p:txBody>
+              <a:bodyPr/>
+              <a:lstStyle/>
+              <a:p>
+                <a:endParaRPr lang="zh-CN" altLang="en-US"/>
+              </a:p>
+            </p:txBody>
           </p:sp>
           <p:sp>
             <p:nvSpPr>
@@ -25675,6 +27603,13 @@
                 </a:solidFill>
               </a:ln>
             </p:spPr>
+            <p:txBody>
+              <a:bodyPr/>
+              <a:lstStyle/>
+              <a:p>
+                <a:endParaRPr lang="zh-CN" altLang="en-US"/>
+              </a:p>
+            </p:txBody>
           </p:sp>
           <p:sp>
             <p:nvSpPr>
@@ -25711,6 +27646,13 @@
                 </a:solidFill>
               </a:ln>
             </p:spPr>
+            <p:txBody>
+              <a:bodyPr/>
+              <a:lstStyle/>
+              <a:p>
+                <a:endParaRPr lang="zh-CN" altLang="en-US"/>
+              </a:p>
+            </p:txBody>
           </p:sp>
         </p:grpSp>
         <p:sp>
@@ -25789,6 +27731,13 @@
               <a:prstDash val="lgDash"/>
             </a:ln>
           </p:spPr>
+          <p:txBody>
+            <a:bodyPr/>
+            <a:lstStyle/>
+            <a:p>
+              <a:endParaRPr lang="zh-CN" altLang="en-US"/>
+            </a:p>
+          </p:txBody>
         </p:sp>
         <p:sp>
           <p:nvSpPr>
@@ -25815,6 +27764,13 @@
               </a:solidFill>
             </a:ln>
           </p:spPr>
+          <p:txBody>
+            <a:bodyPr/>
+            <a:lstStyle/>
+            <a:p>
+              <a:endParaRPr lang="zh-CN" altLang="en-US"/>
+            </a:p>
+          </p:txBody>
         </p:sp>
         <p:grpSp>
           <p:nvGrpSpPr>
@@ -25892,6 +27848,13 @@
                 </a:solidFill>
               </a:ln>
             </p:spPr>
+            <p:txBody>
+              <a:bodyPr/>
+              <a:lstStyle/>
+              <a:p>
+                <a:endParaRPr lang="zh-CN" altLang="en-US"/>
+              </a:p>
+            </p:txBody>
           </p:sp>
           <p:sp>
             <p:nvSpPr>
@@ -25950,6 +27913,13 @@
                 </a:solidFill>
               </a:ln>
             </p:spPr>
+            <p:txBody>
+              <a:bodyPr/>
+              <a:lstStyle/>
+              <a:p>
+                <a:endParaRPr lang="zh-CN" altLang="en-US"/>
+              </a:p>
+            </p:txBody>
           </p:sp>
         </p:grpSp>
         <p:sp>
@@ -26028,6 +27998,13 @@
               <a:prstDash val="lgDash"/>
             </a:ln>
           </p:spPr>
+          <p:txBody>
+            <a:bodyPr/>
+            <a:lstStyle/>
+            <a:p>
+              <a:endParaRPr lang="zh-CN" altLang="en-US"/>
+            </a:p>
+          </p:txBody>
         </p:sp>
         <p:sp>
           <p:nvSpPr>
@@ -26054,6 +28031,13 @@
               </a:solidFill>
             </a:ln>
           </p:spPr>
+          <p:txBody>
+            <a:bodyPr/>
+            <a:lstStyle/>
+            <a:p>
+              <a:endParaRPr lang="zh-CN" altLang="en-US"/>
+            </a:p>
+          </p:txBody>
         </p:sp>
         <p:grpSp>
           <p:nvGrpSpPr>
@@ -26121,6 +28105,13 @@
                 </a:solidFill>
               </a:ln>
             </p:spPr>
+            <p:txBody>
+              <a:bodyPr/>
+              <a:lstStyle/>
+              <a:p>
+                <a:endParaRPr lang="zh-CN" altLang="en-US"/>
+              </a:p>
+            </p:txBody>
           </p:sp>
           <p:sp>
             <p:nvSpPr>
@@ -26170,6 +28161,13 @@
                 </a:solidFill>
               </a:ln>
             </p:spPr>
+            <p:txBody>
+              <a:bodyPr/>
+              <a:lstStyle/>
+              <a:p>
+                <a:endParaRPr lang="zh-CN" altLang="en-US"/>
+              </a:p>
+            </p:txBody>
           </p:sp>
           <p:sp>
             <p:nvSpPr>
@@ -26219,6 +28217,13 @@
                 </a:solidFill>
               </a:ln>
             </p:spPr>
+            <p:txBody>
+              <a:bodyPr/>
+              <a:lstStyle/>
+              <a:p>
+                <a:endParaRPr lang="zh-CN" altLang="en-US"/>
+              </a:p>
+            </p:txBody>
           </p:sp>
         </p:grpSp>
         <p:sp>
@@ -26297,6 +28302,13 @@
               <a:prstDash val="lgDash"/>
             </a:ln>
           </p:spPr>
+          <p:txBody>
+            <a:bodyPr/>
+            <a:lstStyle/>
+            <a:p>
+              <a:endParaRPr lang="zh-CN" altLang="en-US"/>
+            </a:p>
+          </p:txBody>
         </p:sp>
       </p:grpSp>
       <p:grpSp>
@@ -26335,6 +28347,13 @@
               <a:tailEnd type="triangle" w="lg" len="lg"/>
             </a:ln>
           </p:spPr>
+          <p:txBody>
+            <a:bodyPr/>
+            <a:lstStyle/>
+            <a:p>
+              <a:endParaRPr lang="zh-CN" altLang="en-US"/>
+            </a:p>
+          </p:txBody>
         </p:sp>
         <p:sp>
           <p:nvSpPr>
@@ -26361,6 +28380,13 @@
               </a:solidFill>
             </a:ln>
           </p:spPr>
+          <p:txBody>
+            <a:bodyPr/>
+            <a:lstStyle/>
+            <a:p>
+              <a:endParaRPr lang="zh-CN" altLang="en-US"/>
+            </a:p>
+          </p:txBody>
         </p:sp>
         <p:sp>
           <p:nvSpPr>
@@ -26424,6 +28450,13 @@
               <a:tailEnd type="triangle" w="lg" len="lg"/>
             </a:ln>
           </p:spPr>
+          <p:txBody>
+            <a:bodyPr/>
+            <a:lstStyle/>
+            <a:p>
+              <a:endParaRPr lang="zh-CN" altLang="en-US"/>
+            </a:p>
+          </p:txBody>
         </p:sp>
         <p:sp>
           <p:nvSpPr>
@@ -26450,6 +28483,13 @@
               </a:solidFill>
             </a:ln>
           </p:spPr>
+          <p:txBody>
+            <a:bodyPr/>
+            <a:lstStyle/>
+            <a:p>
+              <a:endParaRPr lang="zh-CN" altLang="en-US"/>
+            </a:p>
+          </p:txBody>
         </p:sp>
         <p:sp>
           <p:nvSpPr>
@@ -26513,6 +28553,13 @@
               <a:tailEnd type="triangle" w="lg" len="lg"/>
             </a:ln>
           </p:spPr>
+          <p:txBody>
+            <a:bodyPr/>
+            <a:lstStyle/>
+            <a:p>
+              <a:endParaRPr lang="zh-CN" altLang="en-US"/>
+            </a:p>
+          </p:txBody>
         </p:sp>
         <p:sp>
           <p:nvSpPr>
@@ -26539,6 +28586,13 @@
               </a:solidFill>
             </a:ln>
           </p:spPr>
+          <p:txBody>
+            <a:bodyPr/>
+            <a:lstStyle/>
+            <a:p>
+              <a:endParaRPr lang="zh-CN" altLang="en-US"/>
+            </a:p>
+          </p:txBody>
         </p:sp>
         <p:sp>
           <p:nvSpPr>
@@ -26602,6 +28656,13 @@
               <a:tailEnd type="triangle" w="lg" len="lg"/>
             </a:ln>
           </p:spPr>
+          <p:txBody>
+            <a:bodyPr/>
+            <a:lstStyle/>
+            <a:p>
+              <a:endParaRPr lang="zh-CN" altLang="en-US"/>
+            </a:p>
+          </p:txBody>
         </p:sp>
         <p:sp>
           <p:nvSpPr>
@@ -26628,6 +28689,13 @@
               </a:solidFill>
             </a:ln>
           </p:spPr>
+          <p:txBody>
+            <a:bodyPr/>
+            <a:lstStyle/>
+            <a:p>
+              <a:endParaRPr lang="zh-CN" altLang="en-US"/>
+            </a:p>
+          </p:txBody>
         </p:sp>
         <p:sp>
           <p:nvSpPr>
@@ -26691,6 +28759,13 @@
               <a:tailEnd type="triangle" w="lg" len="lg"/>
             </a:ln>
           </p:spPr>
+          <p:txBody>
+            <a:bodyPr/>
+            <a:lstStyle/>
+            <a:p>
+              <a:endParaRPr lang="zh-CN" altLang="en-US"/>
+            </a:p>
+          </p:txBody>
         </p:sp>
         <p:sp>
           <p:nvSpPr>
@@ -26717,6 +28792,13 @@
               </a:solidFill>
             </a:ln>
           </p:spPr>
+          <p:txBody>
+            <a:bodyPr/>
+            <a:lstStyle/>
+            <a:p>
+              <a:endParaRPr lang="zh-CN" altLang="en-US"/>
+            </a:p>
+          </p:txBody>
         </p:sp>
         <p:sp>
           <p:nvSpPr>
@@ -26808,6 +28890,13 @@
               </a:solidFill>
             </a:ln>
           </p:spPr>
+          <p:txBody>
+            <a:bodyPr/>
+            <a:lstStyle/>
+            <a:p>
+              <a:endParaRPr lang="zh-CN" altLang="en-US"/>
+            </a:p>
+          </p:txBody>
         </p:sp>
         <p:grpSp>
           <p:nvGrpSpPr>
@@ -26875,6 +28964,13 @@
                 </a:solidFill>
               </a:ln>
             </p:spPr>
+            <p:txBody>
+              <a:bodyPr/>
+              <a:lstStyle/>
+              <a:p>
+                <a:endParaRPr lang="zh-CN" altLang="en-US"/>
+              </a:p>
+            </p:txBody>
           </p:sp>
           <p:sp>
             <p:nvSpPr>
@@ -26914,6 +29010,13 @@
                 </a:solidFill>
               </a:ln>
             </p:spPr>
+            <p:txBody>
+              <a:bodyPr/>
+              <a:lstStyle/>
+              <a:p>
+                <a:endParaRPr lang="zh-CN" altLang="en-US"/>
+              </a:p>
+            </p:txBody>
           </p:sp>
         </p:grpSp>
         <p:sp>
@@ -27166,6 +29269,13 @@
               </a:solidFill>
             </a:ln>
           </p:spPr>
+          <p:txBody>
+            <a:bodyPr/>
+            <a:lstStyle/>
+            <a:p>
+              <a:endParaRPr lang="zh-CN" altLang="en-US"/>
+            </a:p>
+          </p:txBody>
         </p:sp>
         <p:sp>
           <p:nvSpPr>
@@ -27253,9 +29363,18 @@
   <p:clrMapOvr>
     <a:masterClrMapping/>
   </p:clrMapOvr>
-  <p:transition xmlns:p14="http://schemas.microsoft.com/office/powerpoint/2010/main" p14:dur="400">
-    <p:fade/>
-  </p:transition>
+  <mc:AlternateContent xmlns:mc="http://schemas.openxmlformats.org/markup-compatibility/2006">
+    <mc:Choice xmlns:p14="http://schemas.microsoft.com/office/powerpoint/2010/main" Requires="p14">
+      <p:transition p14:dur="400">
+        <p:fade/>
+      </p:transition>
+    </mc:Choice>
+    <mc:Fallback>
+      <p:transition>
+        <p:fade/>
+      </p:transition>
+    </mc:Fallback>
+  </mc:AlternateContent>
   <p:timing>
     <p:tnLst>
       <p:par>
@@ -27711,4 +29830,319 @@
   </a:objectDefaults>
   <a:extraClrSchemeLst/>
 </a:theme>
+</file>
+
+<file path=ppt/theme/theme2.xml><?xml version="1.0" encoding="utf-8"?>
+<a:theme xmlns:a="http://schemas.openxmlformats.org/drawingml/2006/main" name="Office 主题​​">
+  <a:themeElements>
+    <a:clrScheme name="Office">
+      <a:dk1>
+        <a:sysClr val="windowText" lastClr="000000"/>
+      </a:dk1>
+      <a:lt1>
+        <a:sysClr val="window" lastClr="FFFFFF"/>
+      </a:lt1>
+      <a:dk2>
+        <a:srgbClr val="0E2841"/>
+      </a:dk2>
+      <a:lt2>
+        <a:srgbClr val="E8E8E8"/>
+      </a:lt2>
+      <a:accent1>
+        <a:srgbClr val="156082"/>
+      </a:accent1>
+      <a:accent2>
+        <a:srgbClr val="E97132"/>
+      </a:accent2>
+      <a:accent3>
+        <a:srgbClr val="196B24"/>
+      </a:accent3>
+      <a:accent4>
+        <a:srgbClr val="0F9ED5"/>
+      </a:accent4>
+      <a:accent5>
+        <a:srgbClr val="A02B93"/>
+      </a:accent5>
+      <a:accent6>
+        <a:srgbClr val="4EA72E"/>
+      </a:accent6>
+      <a:hlink>
+        <a:srgbClr val="467886"/>
+      </a:hlink>
+      <a:folHlink>
+        <a:srgbClr val="96607D"/>
+      </a:folHlink>
+    </a:clrScheme>
+    <a:fontScheme name="Office">
+      <a:majorFont>
+        <a:latin typeface="等线 Light" panose="02110004020202020204"/>
+        <a:ea typeface=""/>
+        <a:cs typeface=""/>
+        <a:font script="Jpan" typeface="游ゴシック Light"/>
+        <a:font script="Hang" typeface="맑은 고딕"/>
+        <a:font script="Hans" typeface="等线 Light"/>
+        <a:font script="Hant" typeface="新細明體"/>
+        <a:font script="Arab" typeface="Times New Roman"/>
+        <a:font script="Hebr" typeface="Times New Roman"/>
+        <a:font script="Thai" typeface="Angsana New"/>
+        <a:font script="Ethi" typeface="Nyala"/>
+        <a:font script="Beng" typeface="Vrinda"/>
+        <a:font script="Gujr" typeface="Shruti"/>
+        <a:font script="Khmr" typeface="MoolBoran"/>
+        <a:font script="Knda" typeface="Tunga"/>
+        <a:font script="Guru" typeface="Raavi"/>
+        <a:font script="Cans" typeface="Euphemia"/>
+        <a:font script="Cher" typeface="Plantagenet Cherokee"/>
+        <a:font script="Yiii" typeface="Microsoft Yi Baiti"/>
+        <a:font script="Tibt" typeface="Microsoft Himalaya"/>
+        <a:font script="Thaa" typeface="MV Boli"/>
+        <a:font script="Deva" typeface="Mangal"/>
+        <a:font script="Telu" typeface="Gautami"/>
+        <a:font script="Taml" typeface="Latha"/>
+        <a:font script="Syrc" typeface="Estrangelo Edessa"/>
+        <a:font script="Orya" typeface="Kalinga"/>
+        <a:font script="Mlym" typeface="Kartika"/>
+        <a:font script="Laoo" typeface="DokChampa"/>
+        <a:font script="Sinh" typeface="Iskoola Pota"/>
+        <a:font script="Mong" typeface="Mongolian Baiti"/>
+        <a:font script="Viet" typeface="Times New Roman"/>
+        <a:font script="Uigh" typeface="Microsoft Uighur"/>
+        <a:font script="Geor" typeface="Sylfaen"/>
+        <a:font script="Armn" typeface="Arial"/>
+        <a:font script="Bugi" typeface="Leelawadee UI"/>
+        <a:font script="Bopo" typeface="Microsoft JhengHei"/>
+        <a:font script="Java" typeface="Javanese Text"/>
+        <a:font script="Lisu" typeface="Segoe UI"/>
+        <a:font script="Mymr" typeface="Myanmar Text"/>
+        <a:font script="Nkoo" typeface="Ebrima"/>
+        <a:font script="Olck" typeface="Nirmala UI"/>
+        <a:font script="Osma" typeface="Ebrima"/>
+        <a:font script="Phag" typeface="Phagspa"/>
+        <a:font script="Syrn" typeface="Estrangelo Edessa"/>
+        <a:font script="Syrj" typeface="Estrangelo Edessa"/>
+        <a:font script="Syre" typeface="Estrangelo Edessa"/>
+        <a:font script="Sora" typeface="Nirmala UI"/>
+        <a:font script="Tale" typeface="Microsoft Tai Le"/>
+        <a:font script="Talu" typeface="Microsoft New Tai Lue"/>
+        <a:font script="Tfng" typeface="Ebrima"/>
+      </a:majorFont>
+      <a:minorFont>
+        <a:latin typeface="等线" panose="02110004020202020204"/>
+        <a:ea typeface=""/>
+        <a:cs typeface=""/>
+        <a:font script="Jpan" typeface="游ゴシック"/>
+        <a:font script="Hang" typeface="맑은 고딕"/>
+        <a:font script="Hans" typeface="等线"/>
+        <a:font script="Hant" typeface="新細明體"/>
+        <a:font script="Arab" typeface="Arial"/>
+        <a:font script="Hebr" typeface="Arial"/>
+        <a:font script="Thai" typeface="Cordia New"/>
+        <a:font script="Ethi" typeface="Nyala"/>
+        <a:font script="Beng" typeface="Vrinda"/>
+        <a:font script="Gujr" typeface="Shruti"/>
+        <a:font script="Khmr" typeface="DaunPenh"/>
+        <a:font script="Knda" typeface="Tunga"/>
+        <a:font script="Guru" typeface="Raavi"/>
+        <a:font script="Cans" typeface="Euphemia"/>
+        <a:font script="Cher" typeface="Plantagenet Cherokee"/>
+        <a:font script="Yiii" typeface="Microsoft Yi Baiti"/>
+        <a:font script="Tibt" typeface="Microsoft Himalaya"/>
+        <a:font script="Thaa" typeface="MV Boli"/>
+        <a:font script="Deva" typeface="Mangal"/>
+        <a:font script="Telu" typeface="Gautami"/>
+        <a:font script="Taml" typeface="Latha"/>
+        <a:font script="Syrc" typeface="Estrangelo Edessa"/>
+        <a:font script="Orya" typeface="Kalinga"/>
+        <a:font script="Mlym" typeface="Kartika"/>
+        <a:font script="Laoo" typeface="DokChampa"/>
+        <a:font script="Sinh" typeface="Iskoola Pota"/>
+        <a:font script="Mong" typeface="Mongolian Baiti"/>
+        <a:font script="Viet" typeface="Arial"/>
+        <a:font script="Uigh" typeface="Microsoft Uighur"/>
+        <a:font script="Geor" typeface="Sylfaen"/>
+        <a:font script="Armn" typeface="Arial"/>
+        <a:font script="Bugi" typeface="Leelawadee UI"/>
+        <a:font script="Bopo" typeface="Microsoft JhengHei"/>
+        <a:font script="Java" typeface="Javanese Text"/>
+        <a:font script="Lisu" typeface="Segoe UI"/>
+        <a:font script="Mymr" typeface="Myanmar Text"/>
+        <a:font script="Nkoo" typeface="Ebrima"/>
+        <a:font script="Olck" typeface="Nirmala UI"/>
+        <a:font script="Osma" typeface="Ebrima"/>
+        <a:font script="Phag" typeface="Phagspa"/>
+        <a:font script="Syrn" typeface="Estrangelo Edessa"/>
+        <a:font script="Syrj" typeface="Estrangelo Edessa"/>
+        <a:font script="Syre" typeface="Estrangelo Edessa"/>
+        <a:font script="Sora" typeface="Nirmala UI"/>
+        <a:font script="Tale" typeface="Microsoft Tai Le"/>
+        <a:font script="Talu" typeface="Microsoft New Tai Lue"/>
+        <a:font script="Tfng" typeface="Ebrima"/>
+      </a:minorFont>
+    </a:fontScheme>
+    <a:fmtScheme name="Office">
+      <a:fillStyleLst>
+        <a:solidFill>
+          <a:schemeClr val="phClr"/>
+        </a:solidFill>
+        <a:gradFill rotWithShape="1">
+          <a:gsLst>
+            <a:gs pos="0">
+              <a:schemeClr val="phClr">
+                <a:lumMod val="110000"/>
+                <a:satMod val="105000"/>
+                <a:tint val="67000"/>
+              </a:schemeClr>
+            </a:gs>
+            <a:gs pos="50000">
+              <a:schemeClr val="phClr">
+                <a:lumMod val="105000"/>
+                <a:satMod val="103000"/>
+                <a:tint val="73000"/>
+              </a:schemeClr>
+            </a:gs>
+            <a:gs pos="100000">
+              <a:schemeClr val="phClr">
+                <a:lumMod val="105000"/>
+                <a:satMod val="109000"/>
+                <a:tint val="81000"/>
+              </a:schemeClr>
+            </a:gs>
+          </a:gsLst>
+          <a:lin ang="5400000" scaled="0"/>
+        </a:gradFill>
+        <a:gradFill rotWithShape="1">
+          <a:gsLst>
+            <a:gs pos="0">
+              <a:schemeClr val="phClr">
+                <a:satMod val="103000"/>
+                <a:lumMod val="102000"/>
+                <a:tint val="94000"/>
+              </a:schemeClr>
+            </a:gs>
+            <a:gs pos="50000">
+              <a:schemeClr val="phClr">
+                <a:satMod val="110000"/>
+                <a:lumMod val="100000"/>
+                <a:shade val="100000"/>
+              </a:schemeClr>
+            </a:gs>
+            <a:gs pos="100000">
+              <a:schemeClr val="phClr">
+                <a:lumMod val="99000"/>
+                <a:satMod val="120000"/>
+                <a:shade val="78000"/>
+              </a:schemeClr>
+            </a:gs>
+          </a:gsLst>
+          <a:lin ang="5400000" scaled="0"/>
+        </a:gradFill>
+      </a:fillStyleLst>
+      <a:lnStyleLst>
+        <a:ln w="12700" cap="flat" cmpd="sng" algn="ctr">
+          <a:solidFill>
+            <a:schemeClr val="phClr"/>
+          </a:solidFill>
+          <a:prstDash val="solid"/>
+          <a:miter lim="800000"/>
+        </a:ln>
+        <a:ln w="19050" cap="flat" cmpd="sng" algn="ctr">
+          <a:solidFill>
+            <a:schemeClr val="phClr"/>
+          </a:solidFill>
+          <a:prstDash val="solid"/>
+          <a:miter lim="800000"/>
+        </a:ln>
+        <a:ln w="25400" cap="flat" cmpd="sng" algn="ctr">
+          <a:solidFill>
+            <a:schemeClr val="phClr"/>
+          </a:solidFill>
+          <a:prstDash val="solid"/>
+          <a:miter lim="800000"/>
+        </a:ln>
+      </a:lnStyleLst>
+      <a:effectStyleLst>
+        <a:effectStyle>
+          <a:effectLst/>
+        </a:effectStyle>
+        <a:effectStyle>
+          <a:effectLst/>
+        </a:effectStyle>
+        <a:effectStyle>
+          <a:effectLst>
+            <a:outerShdw blurRad="57150" dist="19050" dir="5400000" algn="ctr" rotWithShape="0">
+              <a:srgbClr val="000000">
+                <a:alpha val="63000"/>
+              </a:srgbClr>
+            </a:outerShdw>
+          </a:effectLst>
+        </a:effectStyle>
+      </a:effectStyleLst>
+      <a:bgFillStyleLst>
+        <a:solidFill>
+          <a:schemeClr val="phClr"/>
+        </a:solidFill>
+        <a:solidFill>
+          <a:schemeClr val="phClr">
+            <a:tint val="95000"/>
+            <a:satMod val="170000"/>
+          </a:schemeClr>
+        </a:solidFill>
+        <a:gradFill rotWithShape="1">
+          <a:gsLst>
+            <a:gs pos="0">
+              <a:schemeClr val="phClr">
+                <a:tint val="93000"/>
+                <a:satMod val="150000"/>
+                <a:shade val="98000"/>
+                <a:lumMod val="102000"/>
+              </a:schemeClr>
+            </a:gs>
+            <a:gs pos="50000">
+              <a:schemeClr val="phClr">
+                <a:tint val="98000"/>
+                <a:satMod val="130000"/>
+                <a:shade val="90000"/>
+                <a:lumMod val="103000"/>
+              </a:schemeClr>
+            </a:gs>
+            <a:gs pos="100000">
+              <a:schemeClr val="phClr">
+                <a:shade val="63000"/>
+                <a:satMod val="120000"/>
+              </a:schemeClr>
+            </a:gs>
+          </a:gsLst>
+          <a:lin ang="5400000" scaled="0"/>
+        </a:gradFill>
+      </a:bgFillStyleLst>
+    </a:fmtScheme>
+  </a:themeElements>
+  <a:objectDefaults>
+    <a:lnDef>
+      <a:spPr/>
+      <a:bodyPr/>
+      <a:lstStyle/>
+      <a:style>
+        <a:lnRef idx="2">
+          <a:schemeClr val="accent1"/>
+        </a:lnRef>
+        <a:fillRef idx="0">
+          <a:schemeClr val="accent1"/>
+        </a:fillRef>
+        <a:effectRef idx="1">
+          <a:schemeClr val="accent1"/>
+        </a:effectRef>
+        <a:fontRef idx="minor">
+          <a:schemeClr val="tx1"/>
+        </a:fontRef>
+      </a:style>
+    </a:lnDef>
+  </a:objectDefaults>
+  <a:extraClrSchemeLst/>
+  <a:extLst>
+    <a:ext uri="{05A4C25C-085E-4340-85A3-A5531E510DB2}">
+      <thm15:themeFamily xmlns:thm15="http://schemas.microsoft.com/office/thememl/2012/main" name="Office Theme" id="{2E142A2C-CD16-42D6-873A-C26D2A0506FA}" vid="{1BDDFF52-6CD6-40A5-AB3C-68EB2F1E4D0A}"/>
+    </a:ext>
+  </a:extLst>
+</a:theme>
 </file>